--- a/INTRODUCTION (1).pptx
+++ b/INTRODUCTION (1).pptx
@@ -9,59 +9,61 @@
     <p:sldId id="257" r:id="rId3"/>
     <p:sldId id="258" r:id="rId4"/>
     <p:sldId id="259" r:id="rId5"/>
-    <p:sldId id="260" r:id="rId6"/>
-    <p:sldId id="261" r:id="rId7"/>
-    <p:sldId id="262" r:id="rId8"/>
-    <p:sldId id="263" r:id="rId9"/>
-    <p:sldId id="264" r:id="rId10"/>
-    <p:sldId id="265" r:id="rId11"/>
-    <p:sldId id="266" r:id="rId12"/>
-    <p:sldId id="267" r:id="rId13"/>
-    <p:sldId id="268" r:id="rId14"/>
-    <p:sldId id="269" r:id="rId15"/>
-    <p:sldId id="270" r:id="rId16"/>
-    <p:sldId id="271" r:id="rId17"/>
-    <p:sldId id="272" r:id="rId18"/>
-    <p:sldId id="273" r:id="rId19"/>
-    <p:sldId id="274" r:id="rId20"/>
+    <p:sldId id="276" r:id="rId6"/>
+    <p:sldId id="260" r:id="rId7"/>
+    <p:sldId id="261" r:id="rId8"/>
+    <p:sldId id="262" r:id="rId9"/>
+    <p:sldId id="263" r:id="rId10"/>
+    <p:sldId id="275" r:id="rId11"/>
+    <p:sldId id="264" r:id="rId12"/>
+    <p:sldId id="265" r:id="rId13"/>
+    <p:sldId id="266" r:id="rId14"/>
+    <p:sldId id="267" r:id="rId15"/>
+    <p:sldId id="268" r:id="rId16"/>
+    <p:sldId id="269" r:id="rId17"/>
+    <p:sldId id="270" r:id="rId18"/>
+    <p:sldId id="271" r:id="rId19"/>
+    <p:sldId id="272" r:id="rId20"/>
+    <p:sldId id="273" r:id="rId21"/>
+    <p:sldId id="274" r:id="rId22"/>
   </p:sldIdLst>
   <p:sldSz cx="18288000" cy="10287000"/>
   <p:notesSz cx="6858000" cy="9144000"/>
   <p:embeddedFontLst>
     <p:embeddedFont>
       <p:font typeface="Telegraf Bold" panose="020B0604020202020204" charset="0"/>
-      <p:regular r:id="rId21"/>
+      <p:regular r:id="rId23"/>
+    </p:embeddedFont>
+    <p:embeddedFont>
+      <p:font typeface="Canva Sans Bold" panose="020B0604020202020204" charset="0"/>
+      <p:regular r:id="rId24"/>
+    </p:embeddedFont>
+    <p:embeddedFont>
+      <p:font typeface="Poppins" panose="020B0604020202020204" charset="0"/>
+      <p:regular r:id="rId25"/>
+    </p:embeddedFont>
+    <p:embeddedFont>
+      <p:font typeface="Poppins Bold" panose="020B0604020202020204" charset="0"/>
+      <p:regular r:id="rId26"/>
+    </p:embeddedFont>
+    <p:embeddedFont>
+      <p:font typeface="Calibri" panose="020F0502020204030204" pitchFamily="34" charset="0"/>
+      <p:regular r:id="rId27"/>
+      <p:bold r:id="rId28"/>
+      <p:italic r:id="rId29"/>
+      <p:boldItalic r:id="rId30"/>
+    </p:embeddedFont>
+    <p:embeddedFont>
+      <p:font typeface="Arimo" panose="020B0604020202020204" charset="0"/>
+      <p:regular r:id="rId31"/>
+    </p:embeddedFont>
+    <p:embeddedFont>
+      <p:font typeface="Arimo Bold" panose="020B0604020202020204" charset="0"/>
+      <p:regular r:id="rId32"/>
     </p:embeddedFont>
     <p:embeddedFont>
       <p:font typeface="Canva Sans" panose="020B0604020202020204" charset="0"/>
-      <p:regular r:id="rId22"/>
-    </p:embeddedFont>
-    <p:embeddedFont>
-      <p:font typeface="Poppins" panose="020B0604020202020204" charset="0"/>
-      <p:regular r:id="rId23"/>
-    </p:embeddedFont>
-    <p:embeddedFont>
-      <p:font typeface="Calibri" panose="020F0502020204030204" pitchFamily="34" charset="0"/>
-      <p:regular r:id="rId24"/>
-      <p:bold r:id="rId25"/>
-      <p:italic r:id="rId26"/>
-      <p:boldItalic r:id="rId27"/>
-    </p:embeddedFont>
-    <p:embeddedFont>
-      <p:font typeface="Arimo" panose="020B0604020202020204" charset="0"/>
-      <p:regular r:id="rId28"/>
-    </p:embeddedFont>
-    <p:embeddedFont>
-      <p:font typeface="Poppins Bold" panose="020B0604020202020204" charset="0"/>
-      <p:regular r:id="rId29"/>
-    </p:embeddedFont>
-    <p:embeddedFont>
-      <p:font typeface="Canva Sans Bold" panose="020B0604020202020204" charset="0"/>
-      <p:regular r:id="rId30"/>
-    </p:embeddedFont>
-    <p:embeddedFont>
-      <p:font typeface="Arimo Bold" panose="020B0604020202020204" charset="0"/>
-      <p:regular r:id="rId31"/>
+      <p:regular r:id="rId33"/>
     </p:embeddedFont>
   </p:embeddedFontLst>
   <p:defaultTextStyle>
@@ -360,7 +362,7 @@
             <a:fld id="{1D8BD707-D9CF-40AE-B4C6-C98DA3205C09}" type="datetimeFigureOut">
               <a:rPr lang="en-US" smtClean="0"/>
               <a:pPr/>
-              <a:t>11/27/2025</a:t>
+              <a:t>2/26/2026</a:t>
             </a:fld>
             <a:endParaRPr lang="en-US"/>
           </a:p>
@@ -527,7 +529,7 @@
             <a:fld id="{1D8BD707-D9CF-40AE-B4C6-C98DA3205C09}" type="datetimeFigureOut">
               <a:rPr lang="en-US" smtClean="0"/>
               <a:pPr/>
-              <a:t>11/27/2025</a:t>
+              <a:t>2/26/2026</a:t>
             </a:fld>
             <a:endParaRPr lang="en-US"/>
           </a:p>
@@ -704,7 +706,7 @@
             <a:fld id="{1D8BD707-D9CF-40AE-B4C6-C98DA3205C09}" type="datetimeFigureOut">
               <a:rPr lang="en-US" smtClean="0"/>
               <a:pPr/>
-              <a:t>11/27/2025</a:t>
+              <a:t>2/26/2026</a:t>
             </a:fld>
             <a:endParaRPr lang="en-US"/>
           </a:p>
@@ -871,7 +873,7 @@
             <a:fld id="{1D8BD707-D9CF-40AE-B4C6-C98DA3205C09}" type="datetimeFigureOut">
               <a:rPr lang="en-US" smtClean="0"/>
               <a:pPr/>
-              <a:t>11/27/2025</a:t>
+              <a:t>2/26/2026</a:t>
             </a:fld>
             <a:endParaRPr lang="en-US"/>
           </a:p>
@@ -1114,7 +1116,7 @@
             <a:fld id="{1D8BD707-D9CF-40AE-B4C6-C98DA3205C09}" type="datetimeFigureOut">
               <a:rPr lang="en-US" smtClean="0"/>
               <a:pPr/>
-              <a:t>11/27/2025</a:t>
+              <a:t>2/26/2026</a:t>
             </a:fld>
             <a:endParaRPr lang="en-US"/>
           </a:p>
@@ -1399,7 +1401,7 @@
             <a:fld id="{1D8BD707-D9CF-40AE-B4C6-C98DA3205C09}" type="datetimeFigureOut">
               <a:rPr lang="en-US" smtClean="0"/>
               <a:pPr/>
-              <a:t>11/27/2025</a:t>
+              <a:t>2/26/2026</a:t>
             </a:fld>
             <a:endParaRPr lang="en-US"/>
           </a:p>
@@ -1818,7 +1820,7 @@
             <a:fld id="{1D8BD707-D9CF-40AE-B4C6-C98DA3205C09}" type="datetimeFigureOut">
               <a:rPr lang="en-US" smtClean="0"/>
               <a:pPr/>
-              <a:t>11/27/2025</a:t>
+              <a:t>2/26/2026</a:t>
             </a:fld>
             <a:endParaRPr lang="en-US"/>
           </a:p>
@@ -1933,7 +1935,7 @@
             <a:fld id="{1D8BD707-D9CF-40AE-B4C6-C98DA3205C09}" type="datetimeFigureOut">
               <a:rPr lang="en-US" smtClean="0"/>
               <a:pPr/>
-              <a:t>11/27/2025</a:t>
+              <a:t>2/26/2026</a:t>
             </a:fld>
             <a:endParaRPr lang="en-US"/>
           </a:p>
@@ -2025,7 +2027,7 @@
             <a:fld id="{1D8BD707-D9CF-40AE-B4C6-C98DA3205C09}" type="datetimeFigureOut">
               <a:rPr lang="en-US" smtClean="0"/>
               <a:pPr/>
-              <a:t>11/27/2025</a:t>
+              <a:t>2/26/2026</a:t>
             </a:fld>
             <a:endParaRPr lang="en-US"/>
           </a:p>
@@ -2299,7 +2301,7 @@
             <a:fld id="{1D8BD707-D9CF-40AE-B4C6-C98DA3205C09}" type="datetimeFigureOut">
               <a:rPr lang="en-US" smtClean="0"/>
               <a:pPr/>
-              <a:t>11/27/2025</a:t>
+              <a:t>2/26/2026</a:t>
             </a:fld>
             <a:endParaRPr lang="en-US"/>
           </a:p>
@@ -2549,7 +2551,7 @@
             <a:fld id="{1D8BD707-D9CF-40AE-B4C6-C98DA3205C09}" type="datetimeFigureOut">
               <a:rPr lang="en-US" smtClean="0"/>
               <a:pPr/>
-              <a:t>11/27/2025</a:t>
+              <a:t>2/26/2026</a:t>
             </a:fld>
             <a:endParaRPr lang="en-US"/>
           </a:p>
@@ -2759,7 +2761,7 @@
             <a:fld id="{1D8BD707-D9CF-40AE-B4C6-C98DA3205C09}" type="datetimeFigureOut">
               <a:rPr lang="en-US" smtClean="0"/>
               <a:pPr/>
-              <a:t>11/27/2025</a:t>
+              <a:t>2/26/2026</a:t>
             </a:fld>
             <a:endParaRPr lang="en-US"/>
           </a:p>
@@ -3398,6 +3400,623 @@
         </p:nvSpPr>
         <p:spPr>
           <a:xfrm>
+            <a:off x="1447800" y="3238500"/>
+            <a:ext cx="15506700" cy="4219104"/>
+          </a:xfrm>
+          <a:prstGeom prst="rect">
+            <a:avLst/>
+          </a:prstGeom>
+        </p:spPr>
+        <p:txBody>
+          <a:bodyPr wrap="square" lIns="0" tIns="0" rIns="0" bIns="0" rtlCol="0" anchor="t">
+            <a:spAutoFit/>
+          </a:bodyPr>
+          <a:lstStyle/>
+          <a:p>
+            <a:pPr marL="571500" indent="-571500">
+              <a:lnSpc>
+                <a:spcPts val="4746"/>
+              </a:lnSpc>
+              <a:buFont typeface="Arial" panose="020B0604020202020204" pitchFamily="34" charset="0"/>
+              <a:buChar char="•"/>
+            </a:pPr>
+            <a:r>
+              <a:rPr lang="en-US" sz="4000" dirty="0">
+                <a:solidFill>
+                  <a:schemeClr val="bg1"/>
+                </a:solidFill>
+              </a:rPr>
+              <a:t>Sensor nodes in WSNs have limited battery power</a:t>
+            </a:r>
+            <a:r>
+              <a:rPr lang="en-US" sz="4000" dirty="0" smtClean="0">
+                <a:solidFill>
+                  <a:schemeClr val="bg1"/>
+                </a:solidFill>
+              </a:rPr>
+              <a:t>.</a:t>
+            </a:r>
+          </a:p>
+          <a:p>
+            <a:pPr marL="571500" indent="-571500">
+              <a:lnSpc>
+                <a:spcPts val="4746"/>
+              </a:lnSpc>
+              <a:buFont typeface="Arial" panose="020B0604020202020204" pitchFamily="34" charset="0"/>
+              <a:buChar char="•"/>
+            </a:pPr>
+            <a:endParaRPr lang="en-US" sz="4000" dirty="0" smtClean="0">
+              <a:solidFill>
+                <a:schemeClr val="bg1"/>
+              </a:solidFill>
+            </a:endParaRPr>
+          </a:p>
+          <a:p>
+            <a:pPr marL="571500" indent="-571500">
+              <a:lnSpc>
+                <a:spcPts val="4746"/>
+              </a:lnSpc>
+              <a:buFont typeface="Arial" panose="020B0604020202020204" pitchFamily="34" charset="0"/>
+              <a:buChar char="•"/>
+            </a:pPr>
+            <a:r>
+              <a:rPr lang="en-US" sz="4000" dirty="0" smtClean="0">
+                <a:solidFill>
+                  <a:schemeClr val="bg1"/>
+                </a:solidFill>
+              </a:rPr>
+              <a:t>Traditional </a:t>
+            </a:r>
+            <a:r>
+              <a:rPr lang="en-US" sz="4000" dirty="0">
+                <a:solidFill>
+                  <a:schemeClr val="bg1"/>
+                </a:solidFill>
+              </a:rPr>
+              <a:t>static routing methods cause high energy consumption and early node failure. </a:t>
+            </a:r>
+            <a:endParaRPr lang="en-US" sz="4000" dirty="0" smtClean="0">
+              <a:solidFill>
+                <a:schemeClr val="bg1"/>
+              </a:solidFill>
+            </a:endParaRPr>
+          </a:p>
+          <a:p>
+            <a:pPr marL="571500" indent="-571500">
+              <a:lnSpc>
+                <a:spcPts val="4746"/>
+              </a:lnSpc>
+              <a:buFont typeface="Arial" panose="020B0604020202020204" pitchFamily="34" charset="0"/>
+              <a:buChar char="•"/>
+            </a:pPr>
+            <a:endParaRPr lang="en-US" sz="4000" dirty="0" smtClean="0">
+              <a:solidFill>
+                <a:schemeClr val="bg1"/>
+              </a:solidFill>
+            </a:endParaRPr>
+          </a:p>
+          <a:p>
+            <a:pPr marL="571500" indent="-571500">
+              <a:lnSpc>
+                <a:spcPts val="4746"/>
+              </a:lnSpc>
+              <a:buFont typeface="Arial" panose="020B0604020202020204" pitchFamily="34" charset="0"/>
+              <a:buChar char="•"/>
+            </a:pPr>
+            <a:r>
+              <a:rPr lang="en-US" sz="4000" dirty="0" smtClean="0">
+                <a:solidFill>
+                  <a:schemeClr val="bg1"/>
+                </a:solidFill>
+              </a:rPr>
+              <a:t>An </a:t>
+            </a:r>
+            <a:r>
+              <a:rPr lang="en-US" sz="4000" dirty="0">
+                <a:solidFill>
+                  <a:schemeClr val="bg1"/>
+                </a:solidFill>
+              </a:rPr>
+              <a:t>intelligent, adaptive routing and clustering mechanism is required to optimize energy usage and improve network lifetime.</a:t>
+            </a:r>
+            <a:endParaRPr lang="en-US" sz="4000" dirty="0">
+              <a:solidFill>
+                <a:schemeClr val="bg1"/>
+              </a:solidFill>
+              <a:latin typeface="Canva Sans"/>
+              <a:ea typeface="Canva Sans"/>
+              <a:cs typeface="Canva Sans"/>
+              <a:sym typeface="Canva Sans"/>
+            </a:endParaRPr>
+          </a:p>
+        </p:txBody>
+      </p:sp>
+      <p:sp>
+        <p:nvSpPr>
+          <p:cNvPr id="3" name="TextBox 2"/>
+          <p:cNvSpPr txBox="1"/>
+          <p:nvPr/>
+        </p:nvSpPr>
+        <p:spPr>
+          <a:xfrm>
+            <a:off x="1447800" y="1562100"/>
+            <a:ext cx="15506700" cy="670568"/>
+          </a:xfrm>
+          <a:prstGeom prst="rect">
+            <a:avLst/>
+          </a:prstGeom>
+        </p:spPr>
+        <p:txBody>
+          <a:bodyPr wrap="square" lIns="0" tIns="0" rIns="0" bIns="0" rtlCol="0" anchor="t">
+            <a:spAutoFit/>
+          </a:bodyPr>
+          <a:lstStyle/>
+          <a:p>
+            <a:pPr>
+              <a:lnSpc>
+                <a:spcPts val="4746"/>
+              </a:lnSpc>
+            </a:pPr>
+            <a:r>
+              <a:rPr lang="en-US" sz="6600" b="1" dirty="0" smtClean="0">
+                <a:solidFill>
+                  <a:schemeClr val="bg1"/>
+                </a:solidFill>
+                <a:latin typeface="Canva Sans"/>
+                <a:ea typeface="Canva Sans"/>
+                <a:cs typeface="Canva Sans"/>
+                <a:sym typeface="Canva Sans"/>
+              </a:rPr>
+              <a:t>PROBLEM STATEMENT</a:t>
+            </a:r>
+            <a:endParaRPr lang="en-US" sz="6600" b="1" dirty="0">
+              <a:solidFill>
+                <a:schemeClr val="bg1"/>
+              </a:solidFill>
+              <a:latin typeface="Canva Sans"/>
+              <a:ea typeface="Canva Sans"/>
+              <a:cs typeface="Canva Sans"/>
+              <a:sym typeface="Canva Sans"/>
+            </a:endParaRPr>
+          </a:p>
+        </p:txBody>
+      </p:sp>
+    </p:spTree>
+    <p:extLst>
+      <p:ext uri="{BB962C8B-B14F-4D97-AF65-F5344CB8AC3E}">
+        <p14:creationId xmlns:p14="http://schemas.microsoft.com/office/powerpoint/2010/main" val="3222524547"/>
+      </p:ext>
+    </p:extLst>
+  </p:cSld>
+  <p:clrMapOvr>
+    <a:masterClrMapping/>
+  </p:clrMapOvr>
+</p:sld>
+</file>
+
+<file path=ppt/slides/slide11.xml><?xml version="1.0" encoding="utf-8"?>
+<p:sld xmlns:a="http://schemas.openxmlformats.org/drawingml/2006/main" xmlns:r="http://schemas.openxmlformats.org/officeDocument/2006/relationships" xmlns:p="http://schemas.openxmlformats.org/presentationml/2006/main">
+  <p:cSld>
+    <p:bg>
+      <p:bgPr>
+        <a:gradFill rotWithShape="1">
+          <a:gsLst>
+            <a:gs pos="0">
+              <a:srgbClr val="000000">
+                <a:alpha val="100000"/>
+              </a:srgbClr>
+            </a:gs>
+            <a:gs pos="100000">
+              <a:srgbClr val="09033D">
+                <a:alpha val="100000"/>
+              </a:srgbClr>
+            </a:gs>
+          </a:gsLst>
+          <a:path path="circle">
+            <a:fillToRect r="100000" b="100000"/>
+          </a:path>
+          <a:tileRect l="-100000" t="-100000"/>
+        </a:gradFill>
+        <a:effectLst/>
+      </p:bgPr>
+    </p:bg>
+    <p:spTree>
+      <p:nvGrpSpPr>
+        <p:cNvPr id="1" name=""/>
+        <p:cNvGrpSpPr/>
+        <p:nvPr/>
+      </p:nvGrpSpPr>
+      <p:grpSpPr>
+        <a:xfrm>
+          <a:off x="0" y="0"/>
+          <a:ext cx="0" cy="0"/>
+          <a:chOff x="0" y="0"/>
+          <a:chExt cx="0" cy="0"/>
+        </a:xfrm>
+      </p:grpSpPr>
+      <p:sp>
+        <p:nvSpPr>
+          <p:cNvPr id="2" name="TextBox 2"/>
+          <p:cNvSpPr txBox="1"/>
+          <p:nvPr/>
+        </p:nvSpPr>
+        <p:spPr>
+          <a:xfrm>
+            <a:off x="646134" y="246479"/>
+            <a:ext cx="9031266" cy="1141338"/>
+          </a:xfrm>
+          <a:prstGeom prst="rect">
+            <a:avLst/>
+          </a:prstGeom>
+        </p:spPr>
+        <p:txBody>
+          <a:bodyPr wrap="square" lIns="0" tIns="0" rIns="0" bIns="0" rtlCol="0" anchor="t">
+            <a:spAutoFit/>
+          </a:bodyPr>
+          <a:lstStyle/>
+          <a:p>
+            <a:pPr algn="ctr">
+              <a:lnSpc>
+                <a:spcPts val="8899"/>
+              </a:lnSpc>
+            </a:pPr>
+            <a:r>
+              <a:rPr lang="en-US" sz="6356" b="1" dirty="0">
+                <a:solidFill>
+                  <a:srgbClr val="FFFFFF"/>
+                </a:solidFill>
+                <a:latin typeface="Canva Sans Bold"/>
+                <a:ea typeface="Canva Sans Bold"/>
+                <a:cs typeface="Canva Sans Bold"/>
+                <a:sym typeface="Canva Sans Bold"/>
+              </a:rPr>
+              <a:t>PROPOSED SYSTEM</a:t>
+            </a:r>
+          </a:p>
+        </p:txBody>
+      </p:sp>
+      <p:sp>
+        <p:nvSpPr>
+          <p:cNvPr id="3" name="TextBox 3"/>
+          <p:cNvSpPr txBox="1"/>
+          <p:nvPr/>
+        </p:nvSpPr>
+        <p:spPr>
+          <a:xfrm>
+            <a:off x="646134" y="1819592"/>
+            <a:ext cx="16995732" cy="8381365"/>
+          </a:xfrm>
+          <a:prstGeom prst="rect">
+            <a:avLst/>
+          </a:prstGeom>
+        </p:spPr>
+        <p:txBody>
+          <a:bodyPr lIns="0" tIns="0" rIns="0" bIns="0" rtlCol="0" anchor="t">
+            <a:spAutoFit/>
+          </a:bodyPr>
+          <a:lstStyle/>
+          <a:p>
+            <a:pPr algn="l">
+              <a:lnSpc>
+                <a:spcPts val="4759"/>
+              </a:lnSpc>
+            </a:pPr>
+            <a:r>
+              <a:rPr lang="en-US" sz="3399">
+                <a:solidFill>
+                  <a:srgbClr val="FFFFFF"/>
+                </a:solidFill>
+                <a:latin typeface="Canva Sans"/>
+                <a:ea typeface="Canva Sans"/>
+                <a:cs typeface="Canva Sans"/>
+                <a:sym typeface="Canva Sans"/>
+              </a:rPr>
+              <a:t>✔ </a:t>
+            </a:r>
+            <a:r>
+              <a:rPr lang="en-US" sz="3399" b="1">
+                <a:solidFill>
+                  <a:srgbClr val="FFFFFF"/>
+                </a:solidFill>
+                <a:latin typeface="Canva Sans Bold"/>
+                <a:ea typeface="Canva Sans Bold"/>
+                <a:cs typeface="Canva Sans Bold"/>
+                <a:sym typeface="Canva Sans Bold"/>
+              </a:rPr>
+              <a:t>K-Means Clustering</a:t>
+            </a:r>
+          </a:p>
+          <a:p>
+            <a:pPr algn="l">
+              <a:lnSpc>
+                <a:spcPts val="4759"/>
+              </a:lnSpc>
+            </a:pPr>
+            <a:r>
+              <a:rPr lang="en-US" sz="3399">
+                <a:solidFill>
+                  <a:srgbClr val="FFFFFF"/>
+                </a:solidFill>
+                <a:latin typeface="Canva Sans"/>
+                <a:ea typeface="Canva Sans"/>
+                <a:cs typeface="Canva Sans"/>
+                <a:sym typeface="Canva Sans"/>
+              </a:rPr>
+              <a:t>Groups nodes based on location, creates balanced clusters, and reduces communication distance.</a:t>
+            </a:r>
+          </a:p>
+          <a:p>
+            <a:pPr algn="l">
+              <a:lnSpc>
+                <a:spcPts val="4759"/>
+              </a:lnSpc>
+            </a:pPr>
+            <a:endParaRPr lang="en-US" sz="3399">
+              <a:solidFill>
+                <a:srgbClr val="FFFFFF"/>
+              </a:solidFill>
+              <a:latin typeface="Canva Sans"/>
+              <a:ea typeface="Canva Sans"/>
+              <a:cs typeface="Canva Sans"/>
+              <a:sym typeface="Canva Sans"/>
+            </a:endParaRPr>
+          </a:p>
+          <a:p>
+            <a:pPr algn="l">
+              <a:lnSpc>
+                <a:spcPts val="4759"/>
+              </a:lnSpc>
+            </a:pPr>
+            <a:r>
+              <a:rPr lang="en-US" sz="3399">
+                <a:solidFill>
+                  <a:srgbClr val="FFFFFF"/>
+                </a:solidFill>
+                <a:latin typeface="Canva Sans"/>
+                <a:ea typeface="Canva Sans"/>
+                <a:cs typeface="Canva Sans"/>
+                <a:sym typeface="Canva Sans"/>
+              </a:rPr>
+              <a:t>✔</a:t>
+            </a:r>
+            <a:r>
+              <a:rPr lang="en-US" sz="3399" b="1">
+                <a:solidFill>
+                  <a:srgbClr val="FFFFFF"/>
+                </a:solidFill>
+                <a:latin typeface="Canva Sans Bold"/>
+                <a:ea typeface="Canva Sans Bold"/>
+                <a:cs typeface="Canva Sans Bold"/>
+                <a:sym typeface="Canva Sans Bold"/>
+              </a:rPr>
+              <a:t> Q-Learning Routing</a:t>
+            </a:r>
+          </a:p>
+          <a:p>
+            <a:pPr algn="l">
+              <a:lnSpc>
+                <a:spcPts val="4759"/>
+              </a:lnSpc>
+            </a:pPr>
+            <a:r>
+              <a:rPr lang="en-US" sz="3399">
+                <a:solidFill>
+                  <a:srgbClr val="FFFFFF"/>
+                </a:solidFill>
+                <a:latin typeface="Canva Sans"/>
+                <a:ea typeface="Canva Sans"/>
+                <a:cs typeface="Canva Sans"/>
+                <a:sym typeface="Canva Sans"/>
+              </a:rPr>
+              <a:t>Learns optimal multi-hop routes using rewards based on energy, hop count, and successful delivery.</a:t>
+            </a:r>
+          </a:p>
+          <a:p>
+            <a:pPr algn="l">
+              <a:lnSpc>
+                <a:spcPts val="4759"/>
+              </a:lnSpc>
+            </a:pPr>
+            <a:endParaRPr lang="en-US" sz="3399">
+              <a:solidFill>
+                <a:srgbClr val="FFFFFF"/>
+              </a:solidFill>
+              <a:latin typeface="Canva Sans"/>
+              <a:ea typeface="Canva Sans"/>
+              <a:cs typeface="Canva Sans"/>
+              <a:sym typeface="Canva Sans"/>
+            </a:endParaRPr>
+          </a:p>
+          <a:p>
+            <a:pPr algn="l">
+              <a:lnSpc>
+                <a:spcPts val="4759"/>
+              </a:lnSpc>
+            </a:pPr>
+            <a:r>
+              <a:rPr lang="en-US" sz="3399">
+                <a:solidFill>
+                  <a:srgbClr val="FFFFFF"/>
+                </a:solidFill>
+                <a:latin typeface="Canva Sans"/>
+                <a:ea typeface="Canva Sans"/>
+                <a:cs typeface="Canva Sans"/>
+                <a:sym typeface="Canva Sans"/>
+              </a:rPr>
+              <a:t>✔ </a:t>
+            </a:r>
+            <a:r>
+              <a:rPr lang="en-US" sz="3399" b="1">
+                <a:solidFill>
+                  <a:srgbClr val="FFFFFF"/>
+                </a:solidFill>
+                <a:latin typeface="Canva Sans Bold"/>
+                <a:ea typeface="Canva Sans Bold"/>
+                <a:cs typeface="Canva Sans Bold"/>
+                <a:sym typeface="Canva Sans Bold"/>
+              </a:rPr>
+              <a:t>Energy Model</a:t>
+            </a:r>
+          </a:p>
+          <a:p>
+            <a:pPr algn="l">
+              <a:lnSpc>
+                <a:spcPts val="4759"/>
+              </a:lnSpc>
+            </a:pPr>
+            <a:r>
+              <a:rPr lang="en-US" sz="3399">
+                <a:solidFill>
+                  <a:srgbClr val="FFFFFF"/>
+                </a:solidFill>
+                <a:latin typeface="Canva Sans"/>
+                <a:ea typeface="Canva Sans"/>
+                <a:cs typeface="Canva Sans"/>
+                <a:sym typeface="Canva Sans"/>
+              </a:rPr>
+              <a:t>Tracks transmission, reception, and aggregation energy.</a:t>
+            </a:r>
+          </a:p>
+          <a:p>
+            <a:pPr algn="l">
+              <a:lnSpc>
+                <a:spcPts val="4759"/>
+              </a:lnSpc>
+            </a:pPr>
+            <a:endParaRPr lang="en-US" sz="3399">
+              <a:solidFill>
+                <a:srgbClr val="FFFFFF"/>
+              </a:solidFill>
+              <a:latin typeface="Canva Sans"/>
+              <a:ea typeface="Canva Sans"/>
+              <a:cs typeface="Canva Sans"/>
+              <a:sym typeface="Canva Sans"/>
+            </a:endParaRPr>
+          </a:p>
+          <a:p>
+            <a:pPr algn="l">
+              <a:lnSpc>
+                <a:spcPts val="4759"/>
+              </a:lnSpc>
+            </a:pPr>
+            <a:r>
+              <a:rPr lang="en-US" sz="3399">
+                <a:solidFill>
+                  <a:srgbClr val="FFFFFF"/>
+                </a:solidFill>
+                <a:latin typeface="Canva Sans"/>
+                <a:ea typeface="Canva Sans"/>
+                <a:cs typeface="Canva Sans"/>
+                <a:sym typeface="Canva Sans"/>
+              </a:rPr>
+              <a:t>✔ </a:t>
+            </a:r>
+            <a:r>
+              <a:rPr lang="en-US" sz="3399" b="1">
+                <a:solidFill>
+                  <a:srgbClr val="FFFFFF"/>
+                </a:solidFill>
+                <a:latin typeface="Canva Sans Bold"/>
+                <a:ea typeface="Canva Sans Bold"/>
+                <a:cs typeface="Canva Sans Bold"/>
+                <a:sym typeface="Canva Sans Bold"/>
+              </a:rPr>
+              <a:t>Performance Evaluation</a:t>
+            </a:r>
+          </a:p>
+          <a:p>
+            <a:pPr algn="l">
+              <a:lnSpc>
+                <a:spcPts val="4759"/>
+              </a:lnSpc>
+            </a:pPr>
+            <a:r>
+              <a:rPr lang="en-US" sz="3399">
+                <a:solidFill>
+                  <a:srgbClr val="FFFFFF"/>
+                </a:solidFill>
+                <a:latin typeface="Canva Sans"/>
+                <a:ea typeface="Canva Sans"/>
+                <a:cs typeface="Canva Sans"/>
+                <a:sym typeface="Canva Sans"/>
+              </a:rPr>
+              <a:t>Compares with LEACH, DMHT-LEACH, and modern methods like EECDA.</a:t>
+            </a:r>
+          </a:p>
+          <a:p>
+            <a:pPr algn="ctr">
+              <a:lnSpc>
+                <a:spcPts val="4759"/>
+              </a:lnSpc>
+            </a:pPr>
+            <a:endParaRPr lang="en-US" sz="3399">
+              <a:solidFill>
+                <a:srgbClr val="FFFFFF"/>
+              </a:solidFill>
+              <a:latin typeface="Canva Sans"/>
+              <a:ea typeface="Canva Sans"/>
+              <a:cs typeface="Canva Sans"/>
+              <a:sym typeface="Canva Sans"/>
+            </a:endParaRPr>
+          </a:p>
+        </p:txBody>
+      </p:sp>
+    </p:spTree>
+  </p:cSld>
+  <p:clrMapOvr>
+    <a:masterClrMapping/>
+  </p:clrMapOvr>
+</p:sld>
+</file>
+
+<file path=ppt/slides/slide12.xml><?xml version="1.0" encoding="utf-8"?>
+<p:sld xmlns:a="http://schemas.openxmlformats.org/drawingml/2006/main" xmlns:r="http://schemas.openxmlformats.org/officeDocument/2006/relationships" xmlns:p="http://schemas.openxmlformats.org/presentationml/2006/main">
+  <p:cSld>
+    <p:bg>
+      <p:bgPr>
+        <a:gradFill rotWithShape="1">
+          <a:gsLst>
+            <a:gs pos="0">
+              <a:srgbClr val="000000">
+                <a:alpha val="100000"/>
+              </a:srgbClr>
+            </a:gs>
+            <a:gs pos="100000">
+              <a:srgbClr val="09033D">
+                <a:alpha val="100000"/>
+              </a:srgbClr>
+            </a:gs>
+          </a:gsLst>
+          <a:path path="circle">
+            <a:fillToRect r="100000" b="100000"/>
+          </a:path>
+          <a:tileRect l="-100000" t="-100000"/>
+        </a:gradFill>
+        <a:effectLst/>
+      </p:bgPr>
+    </p:bg>
+    <p:spTree>
+      <p:nvGrpSpPr>
+        <p:cNvPr id="1" name=""/>
+        <p:cNvGrpSpPr/>
+        <p:nvPr/>
+      </p:nvGrpSpPr>
+      <p:grpSpPr>
+        <a:xfrm>
+          <a:off x="0" y="0"/>
+          <a:ext cx="0" cy="0"/>
+          <a:chOff x="0" y="0"/>
+          <a:chExt cx="0" cy="0"/>
+        </a:xfrm>
+      </p:grpSpPr>
+      <p:sp>
+        <p:nvSpPr>
+          <p:cNvPr id="2" name="TextBox 2"/>
+          <p:cNvSpPr txBox="1"/>
+          <p:nvPr/>
+        </p:nvSpPr>
+        <p:spPr>
+          <a:xfrm>
             <a:off x="499059" y="422064"/>
             <a:ext cx="15114006" cy="1089447"/>
           </a:xfrm>
@@ -3645,7 +4264,7 @@
 </p:sld>
 </file>
 
-<file path=ppt/slides/slide11.xml><?xml version="1.0" encoding="utf-8"?>
+<file path=ppt/slides/slide13.xml><?xml version="1.0" encoding="utf-8"?>
 <p:sld xmlns:a="http://schemas.openxmlformats.org/drawingml/2006/main" xmlns:r="http://schemas.openxmlformats.org/officeDocument/2006/relationships" xmlns:p="http://schemas.openxmlformats.org/presentationml/2006/main">
   <p:cSld>
     <p:bg>
@@ -4524,7 +5143,7 @@
 </p:sld>
 </file>
 
-<file path=ppt/slides/slide12.xml><?xml version="1.0" encoding="utf-8"?>
+<file path=ppt/slides/slide14.xml><?xml version="1.0" encoding="utf-8"?>
 <p:sld xmlns:a="http://schemas.openxmlformats.org/drawingml/2006/main" xmlns:r="http://schemas.openxmlformats.org/officeDocument/2006/relationships" xmlns:p="http://schemas.openxmlformats.org/presentationml/2006/main">
   <p:cSld>
     <p:bg>
@@ -4854,7 +5473,7 @@
 </p:sld>
 </file>
 
-<file path=ppt/slides/slide13.xml><?xml version="1.0" encoding="utf-8"?>
+<file path=ppt/slides/slide15.xml><?xml version="1.0" encoding="utf-8"?>
 <p:sld xmlns:a="http://schemas.openxmlformats.org/drawingml/2006/main" xmlns:r="http://schemas.openxmlformats.org/officeDocument/2006/relationships" xmlns:p="http://schemas.openxmlformats.org/presentationml/2006/main">
   <p:cSld>
     <p:bg>
@@ -5162,7 +5781,7 @@
 </p:sld>
 </file>
 
-<file path=ppt/slides/slide14.xml><?xml version="1.0" encoding="utf-8"?>
+<file path=ppt/slides/slide16.xml><?xml version="1.0" encoding="utf-8"?>
 <p:sld xmlns:a="http://schemas.openxmlformats.org/drawingml/2006/main" xmlns:r="http://schemas.openxmlformats.org/officeDocument/2006/relationships" xmlns:p="http://schemas.openxmlformats.org/presentationml/2006/main">
   <p:cSld>
     <p:bg>
@@ -5529,7 +6148,7 @@
 </p:sld>
 </file>
 
-<file path=ppt/slides/slide15.xml><?xml version="1.0" encoding="utf-8"?>
+<file path=ppt/slides/slide17.xml><?xml version="1.0" encoding="utf-8"?>
 <p:sld xmlns:a="http://schemas.openxmlformats.org/drawingml/2006/main" xmlns:r="http://schemas.openxmlformats.org/officeDocument/2006/relationships" xmlns:p="http://schemas.openxmlformats.org/presentationml/2006/main">
   <p:cSld>
     <p:bg>
@@ -5862,7 +6481,7 @@
 </p:sld>
 </file>
 
-<file path=ppt/slides/slide16.xml><?xml version="1.0" encoding="utf-8"?>
+<file path=ppt/slides/slide18.xml><?xml version="1.0" encoding="utf-8"?>
 <p:sld xmlns:a="http://schemas.openxmlformats.org/drawingml/2006/main" xmlns:r="http://schemas.openxmlformats.org/officeDocument/2006/relationships" xmlns:p="http://schemas.openxmlformats.org/presentationml/2006/main">
   <p:cSld>
     <p:bg>
@@ -5984,7 +6603,7 @@
         <p:spPr>
           <a:xfrm>
             <a:off x="769784" y="2657378"/>
-            <a:ext cx="15928476" cy="3580765"/>
+            <a:ext cx="15928476" cy="4624215"/>
           </a:xfrm>
           <a:prstGeom prst="rect">
             <a:avLst/>
@@ -5998,11 +6617,11 @@
           <a:p>
             <a:pPr algn="just">
               <a:lnSpc>
-                <a:spcPts val="4759"/>
-              </a:lnSpc>
-            </a:pPr>
-            <a:r>
-              <a:rPr lang="en-US" sz="3399">
+                <a:spcPct val="150000"/>
+              </a:lnSpc>
+            </a:pPr>
+            <a:r>
+              <a:rPr lang="en-US" sz="3399" dirty="0">
                 <a:solidFill>
                   <a:srgbClr val="FFFFFF"/>
                 </a:solidFill>
@@ -6024,7 +6643,7 @@
 </p:sld>
 </file>
 
-<file path=ppt/slides/slide17.xml><?xml version="1.0" encoding="utf-8"?>
+<file path=ppt/slides/slide19.xml><?xml version="1.0" encoding="utf-8"?>
 <p:sld xmlns:a="http://schemas.openxmlformats.org/drawingml/2006/main" xmlns:r="http://schemas.openxmlformats.org/officeDocument/2006/relationships" xmlns:p="http://schemas.openxmlformats.org/presentationml/2006/main">
   <p:cSld>
     <p:bg>
@@ -6338,7 +6957,373 @@
 </p:sld>
 </file>
 
-<file path=ppt/slides/slide18.xml><?xml version="1.0" encoding="utf-8"?>
+<file path=ppt/slides/slide2.xml><?xml version="1.0" encoding="utf-8"?>
+<p:sld xmlns:a="http://schemas.openxmlformats.org/drawingml/2006/main" xmlns:r="http://schemas.openxmlformats.org/officeDocument/2006/relationships" xmlns:p="http://schemas.openxmlformats.org/presentationml/2006/main">
+  <p:cSld>
+    <p:bg>
+      <p:bgPr>
+        <a:gradFill rotWithShape="1">
+          <a:gsLst>
+            <a:gs pos="0">
+              <a:srgbClr val="000000">
+                <a:alpha val="100000"/>
+              </a:srgbClr>
+            </a:gs>
+            <a:gs pos="100000">
+              <a:srgbClr val="09033D">
+                <a:alpha val="100000"/>
+              </a:srgbClr>
+            </a:gs>
+          </a:gsLst>
+          <a:path path="circle">
+            <a:fillToRect r="100000" b="100000"/>
+          </a:path>
+          <a:tileRect l="-100000" t="-100000"/>
+        </a:gradFill>
+        <a:effectLst/>
+      </p:bgPr>
+    </p:bg>
+    <p:spTree>
+      <p:nvGrpSpPr>
+        <p:cNvPr id="1" name=""/>
+        <p:cNvGrpSpPr/>
+        <p:nvPr/>
+      </p:nvGrpSpPr>
+      <p:grpSpPr>
+        <a:xfrm>
+          <a:off x="0" y="0"/>
+          <a:ext cx="0" cy="0"/>
+          <a:chOff x="0" y="0"/>
+          <a:chExt cx="0" cy="0"/>
+        </a:xfrm>
+      </p:grpSpPr>
+      <p:sp>
+        <p:nvSpPr>
+          <p:cNvPr id="2" name="TextBox 2"/>
+          <p:cNvSpPr txBox="1"/>
+          <p:nvPr/>
+        </p:nvSpPr>
+        <p:spPr>
+          <a:xfrm>
+            <a:off x="5595368" y="5067300"/>
+            <a:ext cx="5412266" cy="1309333"/>
+          </a:xfrm>
+          <a:prstGeom prst="rect">
+            <a:avLst/>
+          </a:prstGeom>
+        </p:spPr>
+        <p:txBody>
+          <a:bodyPr wrap="square" lIns="0" tIns="0" rIns="0" bIns="0" rtlCol="0" anchor="t">
+            <a:spAutoFit/>
+          </a:bodyPr>
+          <a:lstStyle/>
+          <a:p>
+            <a:pPr algn="ctr"/>
+            <a:r>
+              <a:rPr lang="en-US" sz="4254" b="1" dirty="0">
+                <a:solidFill>
+                  <a:srgbClr val="FFFFFF"/>
+                </a:solidFill>
+                <a:latin typeface="Canva Sans Bold"/>
+                <a:ea typeface="Canva Sans Bold"/>
+                <a:cs typeface="Canva Sans Bold"/>
+                <a:sym typeface="Canva Sans Bold"/>
+              </a:rPr>
+              <a:t>BATCH 3</a:t>
+            </a:r>
+          </a:p>
+          <a:p>
+            <a:pPr algn="ctr"/>
+            <a:r>
+              <a:rPr lang="en-US" sz="4254" b="1" dirty="0">
+                <a:solidFill>
+                  <a:srgbClr val="FFFFFF"/>
+                </a:solidFill>
+                <a:latin typeface="Canva Sans Bold"/>
+                <a:ea typeface="Canva Sans Bold"/>
+                <a:cs typeface="Canva Sans Bold"/>
+                <a:sym typeface="Canva Sans Bold"/>
+              </a:rPr>
+              <a:t>TEAM MEMBERS</a:t>
+            </a:r>
+          </a:p>
+        </p:txBody>
+      </p:sp>
+      <p:sp>
+        <p:nvSpPr>
+          <p:cNvPr id="3" name="TextBox 3"/>
+          <p:cNvSpPr txBox="1"/>
+          <p:nvPr/>
+        </p:nvSpPr>
+        <p:spPr>
+          <a:xfrm>
+            <a:off x="3429000" y="6819900"/>
+            <a:ext cx="9409769" cy="1661993"/>
+          </a:xfrm>
+          <a:prstGeom prst="rect">
+            <a:avLst/>
+          </a:prstGeom>
+        </p:spPr>
+        <p:txBody>
+          <a:bodyPr lIns="0" tIns="0" rIns="0" bIns="0" rtlCol="0" anchor="t">
+            <a:spAutoFit/>
+          </a:bodyPr>
+          <a:lstStyle/>
+          <a:p>
+            <a:pPr algn="ctr"/>
+            <a:r>
+              <a:rPr lang="en-US" sz="3600" dirty="0">
+                <a:solidFill>
+                  <a:srgbClr val="FFFFFF"/>
+                </a:solidFill>
+                <a:latin typeface="Canva Sans"/>
+                <a:ea typeface="Canva Sans"/>
+                <a:cs typeface="Canva Sans"/>
+                <a:sym typeface="Canva Sans"/>
+              </a:rPr>
+              <a:t>REENA S (</a:t>
+            </a:r>
+            <a:r>
+              <a:rPr lang="en-US" sz="3600" dirty="0" smtClean="0">
+                <a:solidFill>
+                  <a:srgbClr val="FFFFFF"/>
+                </a:solidFill>
+                <a:latin typeface="Canva Sans"/>
+                <a:ea typeface="Canva Sans"/>
+                <a:cs typeface="Canva Sans"/>
+                <a:sym typeface="Canva Sans"/>
+              </a:rPr>
+              <a:t>8115U22CB044)</a:t>
+            </a:r>
+          </a:p>
+          <a:p>
+            <a:pPr algn="ctr"/>
+            <a:r>
+              <a:rPr lang="en-US" sz="3600" dirty="0" smtClean="0">
+                <a:solidFill>
+                  <a:srgbClr val="FFFFFF"/>
+                </a:solidFill>
+                <a:latin typeface="Canva Sans"/>
+                <a:ea typeface="Canva Sans"/>
+                <a:cs typeface="Canva Sans"/>
+                <a:sym typeface="Canva Sans"/>
+              </a:rPr>
+              <a:t>              SHREE </a:t>
+            </a:r>
+            <a:r>
+              <a:rPr lang="en-US" sz="3600" dirty="0">
+                <a:solidFill>
+                  <a:srgbClr val="FFFFFF"/>
+                </a:solidFill>
+                <a:latin typeface="Canva Sans"/>
+                <a:ea typeface="Canva Sans"/>
+                <a:cs typeface="Canva Sans"/>
+                <a:sym typeface="Canva Sans"/>
+              </a:rPr>
+              <a:t>HARINI S (8115U22CB050)</a:t>
+            </a:r>
+          </a:p>
+          <a:p>
+            <a:pPr algn="ctr"/>
+            <a:r>
+              <a:rPr lang="en-US" sz="3600" dirty="0" smtClean="0">
+                <a:solidFill>
+                  <a:srgbClr val="FFFFFF"/>
+                </a:solidFill>
+                <a:latin typeface="Canva Sans"/>
+                <a:ea typeface="Canva Sans"/>
+                <a:cs typeface="Canva Sans"/>
+                <a:sym typeface="Canva Sans"/>
+              </a:rPr>
+              <a:t>               SOUNDARYA </a:t>
+            </a:r>
+            <a:r>
+              <a:rPr lang="en-US" sz="3600" dirty="0">
+                <a:solidFill>
+                  <a:srgbClr val="FFFFFF"/>
+                </a:solidFill>
+                <a:latin typeface="Canva Sans"/>
+                <a:ea typeface="Canva Sans"/>
+                <a:cs typeface="Canva Sans"/>
+                <a:sym typeface="Canva Sans"/>
+              </a:rPr>
+              <a:t>A L (8115U22CB052)</a:t>
+            </a:r>
+          </a:p>
+        </p:txBody>
+      </p:sp>
+      <p:sp>
+        <p:nvSpPr>
+          <p:cNvPr id="4" name="TextBox 4"/>
+          <p:cNvSpPr txBox="1"/>
+          <p:nvPr/>
+        </p:nvSpPr>
+        <p:spPr>
+          <a:xfrm>
+            <a:off x="6170134" y="933450"/>
+            <a:ext cx="4262735" cy="887095"/>
+          </a:xfrm>
+          <a:prstGeom prst="rect">
+            <a:avLst/>
+          </a:prstGeom>
+        </p:spPr>
+        <p:txBody>
+          <a:bodyPr lIns="0" tIns="0" rIns="0" bIns="0" rtlCol="0" anchor="t">
+            <a:spAutoFit/>
+          </a:bodyPr>
+          <a:lstStyle/>
+          <a:p>
+            <a:pPr algn="ctr">
+              <a:lnSpc>
+                <a:spcPts val="7279"/>
+              </a:lnSpc>
+            </a:pPr>
+            <a:r>
+              <a:rPr lang="en-US" sz="5199" b="1">
+                <a:solidFill>
+                  <a:srgbClr val="FFFFFF"/>
+                </a:solidFill>
+                <a:latin typeface="Canva Sans Bold"/>
+                <a:ea typeface="Canva Sans Bold"/>
+                <a:cs typeface="Canva Sans Bold"/>
+                <a:sym typeface="Canva Sans Bold"/>
+              </a:rPr>
+              <a:t>GUIDE NAME</a:t>
+            </a:r>
+          </a:p>
+        </p:txBody>
+      </p:sp>
+      <p:sp>
+        <p:nvSpPr>
+          <p:cNvPr id="5" name="TextBox 5"/>
+          <p:cNvSpPr txBox="1"/>
+          <p:nvPr/>
+        </p:nvSpPr>
+        <p:spPr>
+          <a:xfrm>
+            <a:off x="2667000" y="2123993"/>
+            <a:ext cx="11846243" cy="2666564"/>
+          </a:xfrm>
+          <a:prstGeom prst="rect">
+            <a:avLst/>
+          </a:prstGeom>
+        </p:spPr>
+        <p:txBody>
+          <a:bodyPr lIns="0" tIns="0" rIns="0" bIns="0" rtlCol="0" anchor="t">
+            <a:spAutoFit/>
+          </a:bodyPr>
+          <a:lstStyle/>
+          <a:p>
+            <a:pPr algn="ctr"/>
+            <a:r>
+              <a:rPr lang="en-US" sz="3399" b="1" dirty="0">
+                <a:solidFill>
+                  <a:srgbClr val="FFFFFF"/>
+                </a:solidFill>
+                <a:latin typeface="Canva Sans Bold"/>
+                <a:ea typeface="Canva Sans Bold"/>
+                <a:cs typeface="Canva Sans Bold"/>
+                <a:sym typeface="Canva Sans Bold"/>
+              </a:rPr>
+              <a:t>Mrs. P. UMA MAHESHWARI, M.E.</a:t>
+            </a:r>
+          </a:p>
+          <a:p>
+            <a:pPr algn="ctr"/>
+            <a:r>
+              <a:rPr lang="en-US" sz="3399" dirty="0">
+                <a:solidFill>
+                  <a:srgbClr val="FFFFFF"/>
+                </a:solidFill>
+                <a:latin typeface="Canva Sans"/>
+                <a:ea typeface="Canva Sans"/>
+                <a:cs typeface="Canva Sans"/>
+                <a:sym typeface="Canva Sans"/>
+              </a:rPr>
+              <a:t> Assistant Professor,</a:t>
+            </a:r>
+          </a:p>
+          <a:p>
+            <a:pPr algn="ctr"/>
+            <a:r>
+              <a:rPr lang="en-US" sz="3399" dirty="0">
+                <a:solidFill>
+                  <a:srgbClr val="FFFFFF"/>
+                </a:solidFill>
+                <a:latin typeface="Canva Sans"/>
+                <a:ea typeface="Canva Sans"/>
+                <a:cs typeface="Canva Sans"/>
+                <a:sym typeface="Canva Sans"/>
+              </a:rPr>
+              <a:t> Department of CSBS,</a:t>
+            </a:r>
+          </a:p>
+          <a:p>
+            <a:pPr algn="ctr"/>
+            <a:r>
+              <a:rPr lang="en-US" sz="3399" dirty="0">
+                <a:solidFill>
+                  <a:srgbClr val="FFFFFF"/>
+                </a:solidFill>
+                <a:latin typeface="Canva Sans"/>
+                <a:ea typeface="Canva Sans"/>
+                <a:cs typeface="Canva Sans"/>
+                <a:sym typeface="Canva Sans"/>
+              </a:rPr>
+              <a:t> K. </a:t>
+            </a:r>
+            <a:r>
+              <a:rPr lang="en-US" sz="3399" dirty="0" err="1">
+                <a:solidFill>
+                  <a:srgbClr val="FFFFFF"/>
+                </a:solidFill>
+                <a:latin typeface="Canva Sans"/>
+                <a:ea typeface="Canva Sans"/>
+                <a:cs typeface="Canva Sans"/>
+                <a:sym typeface="Canva Sans"/>
+              </a:rPr>
+              <a:t>Ramakrishnan</a:t>
+            </a:r>
+            <a:r>
+              <a:rPr lang="en-US" sz="3399" dirty="0">
+                <a:solidFill>
+                  <a:srgbClr val="FFFFFF"/>
+                </a:solidFill>
+                <a:latin typeface="Canva Sans"/>
+                <a:ea typeface="Canva Sans"/>
+                <a:cs typeface="Canva Sans"/>
+                <a:sym typeface="Canva Sans"/>
+              </a:rPr>
+              <a:t> College of Engineering (Autonomous)</a:t>
+            </a:r>
+          </a:p>
+          <a:p>
+            <a:pPr algn="ctr">
+              <a:lnSpc>
+                <a:spcPts val="4759"/>
+              </a:lnSpc>
+            </a:pPr>
+            <a:endParaRPr lang="en-US" sz="3399" dirty="0">
+              <a:solidFill>
+                <a:srgbClr val="FFFFFF"/>
+              </a:solidFill>
+              <a:latin typeface="Canva Sans"/>
+              <a:ea typeface="Canva Sans"/>
+              <a:cs typeface="Canva Sans"/>
+              <a:sym typeface="Canva Sans"/>
+            </a:endParaRPr>
+          </a:p>
+        </p:txBody>
+      </p:sp>
+    </p:spTree>
+  </p:cSld>
+  <p:clrMapOvr>
+    <a:masterClrMapping/>
+  </p:clrMapOvr>
+</p:sld>
+</file>
+
+<file path=ppt/slides/slide20.xml><?xml version="1.0" encoding="utf-8"?>
 <p:sld xmlns:a="http://schemas.openxmlformats.org/drawingml/2006/main" xmlns:r="http://schemas.openxmlformats.org/officeDocument/2006/relationships" xmlns:p="http://schemas.openxmlformats.org/presentationml/2006/main">
   <p:cSld>
     <p:bg>
@@ -6611,7 +7596,7 @@
 </p:sld>
 </file>
 
-<file path=ppt/slides/slide19.xml><?xml version="1.0" encoding="utf-8"?>
+<file path=ppt/slides/slide21.xml><?xml version="1.0" encoding="utf-8"?>
 <p:sld xmlns:a="http://schemas.openxmlformats.org/drawingml/2006/main" xmlns:r="http://schemas.openxmlformats.org/officeDocument/2006/relationships" xmlns:p="http://schemas.openxmlformats.org/presentationml/2006/main">
   <p:cSld>
     <p:bg>
@@ -6689,404 +7674,6 @@
               </a:rPr>
               <a:t>THANK YOU</a:t>
             </a:r>
-          </a:p>
-        </p:txBody>
-      </p:sp>
-    </p:spTree>
-  </p:cSld>
-  <p:clrMapOvr>
-    <a:masterClrMapping/>
-  </p:clrMapOvr>
-</p:sld>
-</file>
-
-<file path=ppt/slides/slide2.xml><?xml version="1.0" encoding="utf-8"?>
-<p:sld xmlns:a="http://schemas.openxmlformats.org/drawingml/2006/main" xmlns:r="http://schemas.openxmlformats.org/officeDocument/2006/relationships" xmlns:p="http://schemas.openxmlformats.org/presentationml/2006/main">
-  <p:cSld>
-    <p:bg>
-      <p:bgPr>
-        <a:gradFill rotWithShape="1">
-          <a:gsLst>
-            <a:gs pos="0">
-              <a:srgbClr val="000000">
-                <a:alpha val="100000"/>
-              </a:srgbClr>
-            </a:gs>
-            <a:gs pos="100000">
-              <a:srgbClr val="09033D">
-                <a:alpha val="100000"/>
-              </a:srgbClr>
-            </a:gs>
-          </a:gsLst>
-          <a:path path="circle">
-            <a:fillToRect r="100000" b="100000"/>
-          </a:path>
-          <a:tileRect l="-100000" t="-100000"/>
-        </a:gradFill>
-        <a:effectLst/>
-      </p:bgPr>
-    </p:bg>
-    <p:spTree>
-      <p:nvGrpSpPr>
-        <p:cNvPr id="1" name=""/>
-        <p:cNvGrpSpPr/>
-        <p:nvPr/>
-      </p:nvGrpSpPr>
-      <p:grpSpPr>
-        <a:xfrm>
-          <a:off x="0" y="0"/>
-          <a:ext cx="0" cy="0"/>
-          <a:chOff x="0" y="0"/>
-          <a:chExt cx="0" cy="0"/>
-        </a:xfrm>
-      </p:grpSpPr>
-      <p:sp>
-        <p:nvSpPr>
-          <p:cNvPr id="2" name="TextBox 2"/>
-          <p:cNvSpPr txBox="1"/>
-          <p:nvPr/>
-        </p:nvSpPr>
-        <p:spPr>
-          <a:xfrm>
-            <a:off x="5595368" y="5067300"/>
-            <a:ext cx="5412266" cy="1538883"/>
-          </a:xfrm>
-          <a:prstGeom prst="rect">
-            <a:avLst/>
-          </a:prstGeom>
-        </p:spPr>
-        <p:txBody>
-          <a:bodyPr wrap="square" lIns="0" tIns="0" rIns="0" bIns="0" rtlCol="0" anchor="t">
-            <a:spAutoFit/>
-          </a:bodyPr>
-          <a:lstStyle/>
-          <a:p>
-            <a:pPr algn="ctr">
-              <a:lnSpc>
-                <a:spcPts val="5955"/>
-              </a:lnSpc>
-            </a:pPr>
-            <a:r>
-              <a:rPr lang="en-US" sz="4254" b="1" dirty="0">
-                <a:solidFill>
-                  <a:srgbClr val="FFFFFF"/>
-                </a:solidFill>
-                <a:latin typeface="Canva Sans Bold"/>
-                <a:ea typeface="Canva Sans Bold"/>
-                <a:cs typeface="Canva Sans Bold"/>
-                <a:sym typeface="Canva Sans Bold"/>
-              </a:rPr>
-              <a:t>BATCH 3</a:t>
-            </a:r>
-          </a:p>
-          <a:p>
-            <a:pPr algn="ctr">
-              <a:lnSpc>
-                <a:spcPts val="5955"/>
-              </a:lnSpc>
-            </a:pPr>
-            <a:r>
-              <a:rPr lang="en-US" sz="4254" b="1" dirty="0">
-                <a:solidFill>
-                  <a:srgbClr val="FFFFFF"/>
-                </a:solidFill>
-                <a:latin typeface="Canva Sans Bold"/>
-                <a:ea typeface="Canva Sans Bold"/>
-                <a:cs typeface="Canva Sans Bold"/>
-                <a:sym typeface="Canva Sans Bold"/>
-              </a:rPr>
-              <a:t>TEAM MEMBERS</a:t>
-            </a:r>
-          </a:p>
-        </p:txBody>
-      </p:sp>
-      <p:sp>
-        <p:nvSpPr>
-          <p:cNvPr id="3" name="TextBox 3"/>
-          <p:cNvSpPr txBox="1"/>
-          <p:nvPr/>
-        </p:nvSpPr>
-        <p:spPr>
-          <a:xfrm>
-            <a:off x="3596617" y="6808197"/>
-            <a:ext cx="9409769" cy="3166110"/>
-          </a:xfrm>
-          <a:prstGeom prst="rect">
-            <a:avLst/>
-          </a:prstGeom>
-        </p:spPr>
-        <p:txBody>
-          <a:bodyPr lIns="0" tIns="0" rIns="0" bIns="0" rtlCol="0" anchor="t">
-            <a:spAutoFit/>
-          </a:bodyPr>
-          <a:lstStyle/>
-          <a:p>
-            <a:pPr algn="ctr">
-              <a:lnSpc>
-                <a:spcPts val="5040"/>
-              </a:lnSpc>
-            </a:pPr>
-            <a:r>
-              <a:rPr lang="en-US" sz="3600">
-                <a:solidFill>
-                  <a:srgbClr val="FFFFFF"/>
-                </a:solidFill>
-                <a:latin typeface="Canva Sans"/>
-                <a:ea typeface="Canva Sans"/>
-                <a:cs typeface="Canva Sans"/>
-                <a:sym typeface="Canva Sans"/>
-              </a:rPr>
-              <a:t>REENA S (8115U22CB044)</a:t>
-            </a:r>
-          </a:p>
-          <a:p>
-            <a:pPr algn="ctr">
-              <a:lnSpc>
-                <a:spcPts val="5040"/>
-              </a:lnSpc>
-            </a:pPr>
-            <a:endParaRPr lang="en-US" sz="3600">
-              <a:solidFill>
-                <a:srgbClr val="FFFFFF"/>
-              </a:solidFill>
-              <a:latin typeface="Canva Sans"/>
-              <a:ea typeface="Canva Sans"/>
-              <a:cs typeface="Canva Sans"/>
-              <a:sym typeface="Canva Sans"/>
-            </a:endParaRPr>
-          </a:p>
-          <a:p>
-            <a:pPr algn="ctr">
-              <a:lnSpc>
-                <a:spcPts val="5040"/>
-              </a:lnSpc>
-            </a:pPr>
-            <a:r>
-              <a:rPr lang="en-US" sz="3600">
-                <a:solidFill>
-                  <a:srgbClr val="FFFFFF"/>
-                </a:solidFill>
-                <a:latin typeface="Canva Sans"/>
-                <a:ea typeface="Canva Sans"/>
-                <a:cs typeface="Canva Sans"/>
-                <a:sym typeface="Canva Sans"/>
-              </a:rPr>
-              <a:t>              SHREE HARINI S (8115U22CB050)</a:t>
-            </a:r>
-          </a:p>
-          <a:p>
-            <a:pPr algn="ctr">
-              <a:lnSpc>
-                <a:spcPts val="5040"/>
-              </a:lnSpc>
-            </a:pPr>
-            <a:endParaRPr lang="en-US" sz="3600">
-              <a:solidFill>
-                <a:srgbClr val="FFFFFF"/>
-              </a:solidFill>
-              <a:latin typeface="Canva Sans"/>
-              <a:ea typeface="Canva Sans"/>
-              <a:cs typeface="Canva Sans"/>
-              <a:sym typeface="Canva Sans"/>
-            </a:endParaRPr>
-          </a:p>
-          <a:p>
-            <a:pPr algn="ctr">
-              <a:lnSpc>
-                <a:spcPts val="5040"/>
-              </a:lnSpc>
-            </a:pPr>
-            <a:r>
-              <a:rPr lang="en-US" sz="3600">
-                <a:solidFill>
-                  <a:srgbClr val="FFFFFF"/>
-                </a:solidFill>
-                <a:latin typeface="Canva Sans"/>
-                <a:ea typeface="Canva Sans"/>
-                <a:cs typeface="Canva Sans"/>
-                <a:sym typeface="Canva Sans"/>
-              </a:rPr>
-              <a:t>               SOUNDARYA A L (8115U22CB052)</a:t>
-            </a:r>
-          </a:p>
-        </p:txBody>
-      </p:sp>
-      <p:sp>
-        <p:nvSpPr>
-          <p:cNvPr id="4" name="TextBox 4"/>
-          <p:cNvSpPr txBox="1"/>
-          <p:nvPr/>
-        </p:nvSpPr>
-        <p:spPr>
-          <a:xfrm>
-            <a:off x="6170134" y="933450"/>
-            <a:ext cx="4262735" cy="887095"/>
-          </a:xfrm>
-          <a:prstGeom prst="rect">
-            <a:avLst/>
-          </a:prstGeom>
-        </p:spPr>
-        <p:txBody>
-          <a:bodyPr lIns="0" tIns="0" rIns="0" bIns="0" rtlCol="0" anchor="t">
-            <a:spAutoFit/>
-          </a:bodyPr>
-          <a:lstStyle/>
-          <a:p>
-            <a:pPr algn="ctr">
-              <a:lnSpc>
-                <a:spcPts val="7279"/>
-              </a:lnSpc>
-            </a:pPr>
-            <a:r>
-              <a:rPr lang="en-US" sz="5199" b="1">
-                <a:solidFill>
-                  <a:srgbClr val="FFFFFF"/>
-                </a:solidFill>
-                <a:latin typeface="Canva Sans Bold"/>
-                <a:ea typeface="Canva Sans Bold"/>
-                <a:cs typeface="Canva Sans Bold"/>
-                <a:sym typeface="Canva Sans Bold"/>
-              </a:rPr>
-              <a:t>GUIDE NAME</a:t>
-            </a:r>
-          </a:p>
-        </p:txBody>
-      </p:sp>
-      <p:sp>
-        <p:nvSpPr>
-          <p:cNvPr id="5" name="TextBox 5"/>
-          <p:cNvSpPr txBox="1"/>
-          <p:nvPr/>
-        </p:nvSpPr>
-        <p:spPr>
-          <a:xfrm>
-            <a:off x="2726302" y="2426062"/>
-            <a:ext cx="11846243" cy="2980690"/>
-          </a:xfrm>
-          <a:prstGeom prst="rect">
-            <a:avLst/>
-          </a:prstGeom>
-        </p:spPr>
-        <p:txBody>
-          <a:bodyPr lIns="0" tIns="0" rIns="0" bIns="0" rtlCol="0" anchor="t">
-            <a:spAutoFit/>
-          </a:bodyPr>
-          <a:lstStyle/>
-          <a:p>
-            <a:pPr algn="ctr">
-              <a:lnSpc>
-                <a:spcPts val="4759"/>
-              </a:lnSpc>
-            </a:pPr>
-            <a:r>
-              <a:rPr lang="en-US" sz="3399" b="1" dirty="0">
-                <a:solidFill>
-                  <a:srgbClr val="FFFFFF"/>
-                </a:solidFill>
-                <a:latin typeface="Canva Sans Bold"/>
-                <a:ea typeface="Canva Sans Bold"/>
-                <a:cs typeface="Canva Sans Bold"/>
-                <a:sym typeface="Canva Sans Bold"/>
-              </a:rPr>
-              <a:t>Mrs. P. UMA MAHESHWARI, M.E.</a:t>
-            </a:r>
-          </a:p>
-          <a:p>
-            <a:pPr algn="ctr">
-              <a:lnSpc>
-                <a:spcPts val="4759"/>
-              </a:lnSpc>
-            </a:pPr>
-            <a:r>
-              <a:rPr lang="en-US" sz="3399" dirty="0">
-                <a:solidFill>
-                  <a:srgbClr val="FFFFFF"/>
-                </a:solidFill>
-                <a:latin typeface="Canva Sans"/>
-                <a:ea typeface="Canva Sans"/>
-                <a:cs typeface="Canva Sans"/>
-                <a:sym typeface="Canva Sans"/>
-              </a:rPr>
-              <a:t> Assistant Professor,</a:t>
-            </a:r>
-          </a:p>
-          <a:p>
-            <a:pPr algn="ctr">
-              <a:lnSpc>
-                <a:spcPts val="4759"/>
-              </a:lnSpc>
-            </a:pPr>
-            <a:r>
-              <a:rPr lang="en-US" sz="3399" dirty="0">
-                <a:solidFill>
-                  <a:srgbClr val="FFFFFF"/>
-                </a:solidFill>
-                <a:latin typeface="Canva Sans"/>
-                <a:ea typeface="Canva Sans"/>
-                <a:cs typeface="Canva Sans"/>
-                <a:sym typeface="Canva Sans"/>
-              </a:rPr>
-              <a:t> Department of CSBS,</a:t>
-            </a:r>
-          </a:p>
-          <a:p>
-            <a:pPr algn="ctr">
-              <a:lnSpc>
-                <a:spcPts val="4759"/>
-              </a:lnSpc>
-            </a:pPr>
-            <a:r>
-              <a:rPr lang="en-US" sz="3399" dirty="0">
-                <a:solidFill>
-                  <a:srgbClr val="FFFFFF"/>
-                </a:solidFill>
-                <a:latin typeface="Canva Sans"/>
-                <a:ea typeface="Canva Sans"/>
-                <a:cs typeface="Canva Sans"/>
-                <a:sym typeface="Canva Sans"/>
-              </a:rPr>
-              <a:t> K. </a:t>
-            </a:r>
-            <a:r>
-              <a:rPr lang="en-US" sz="3399" dirty="0" err="1">
-                <a:solidFill>
-                  <a:srgbClr val="FFFFFF"/>
-                </a:solidFill>
-                <a:latin typeface="Canva Sans"/>
-                <a:ea typeface="Canva Sans"/>
-                <a:cs typeface="Canva Sans"/>
-                <a:sym typeface="Canva Sans"/>
-              </a:rPr>
-              <a:t>Ramakrishnan</a:t>
-            </a:r>
-            <a:r>
-              <a:rPr lang="en-US" sz="3399" dirty="0">
-                <a:solidFill>
-                  <a:srgbClr val="FFFFFF"/>
-                </a:solidFill>
-                <a:latin typeface="Canva Sans"/>
-                <a:ea typeface="Canva Sans"/>
-                <a:cs typeface="Canva Sans"/>
-                <a:sym typeface="Canva Sans"/>
-              </a:rPr>
-              <a:t> College of Engineering (Autonomous)</a:t>
-            </a:r>
-          </a:p>
-          <a:p>
-            <a:pPr algn="ctr">
-              <a:lnSpc>
-                <a:spcPts val="4759"/>
-              </a:lnSpc>
-            </a:pPr>
-            <a:endParaRPr lang="en-US" sz="3399" dirty="0">
-              <a:solidFill>
-                <a:srgbClr val="FFFFFF"/>
-              </a:solidFill>
-              <a:latin typeface="Canva Sans"/>
-              <a:ea typeface="Canva Sans"/>
-              <a:cs typeface="Canva Sans"/>
-              <a:sym typeface="Canva Sans"/>
-            </a:endParaRPr>
           </a:p>
         </p:txBody>
       </p:sp>
@@ -7187,225 +7774,447 @@
         </p:nvSpPr>
         <p:spPr>
           <a:xfrm>
-            <a:off x="6146643" y="1974870"/>
-            <a:ext cx="5605165" cy="7624471"/>
+            <a:off x="2286000" y="2576621"/>
+            <a:ext cx="7340757" cy="6127703"/>
           </a:xfrm>
           <a:prstGeom prst="rect">
             <a:avLst/>
           </a:prstGeom>
         </p:spPr>
         <p:txBody>
-          <a:bodyPr lIns="0" tIns="0" rIns="0" bIns="0" rtlCol="0" anchor="t">
+          <a:bodyPr wrap="square" lIns="0" tIns="0" rIns="0" bIns="0" rtlCol="0" anchor="t">
             <a:spAutoFit/>
           </a:bodyPr>
           <a:lstStyle/>
           <a:p>
+            <a:pPr marL="742950" indent="-742950" algn="l">
+              <a:lnSpc>
+                <a:spcPct val="150000"/>
+              </a:lnSpc>
+              <a:buFont typeface="Wingdings" panose="05000000000000000000" pitchFamily="2" charset="2"/>
+              <a:buChar char="q"/>
+            </a:pPr>
+            <a:r>
+              <a:rPr lang="en-US" sz="3948" dirty="0" smtClean="0">
+                <a:solidFill>
+                  <a:srgbClr val="FFFFFF"/>
+                </a:solidFill>
+                <a:latin typeface="Canva Sans"/>
+                <a:ea typeface="Canva Sans"/>
+                <a:cs typeface="Canva Sans"/>
+                <a:sym typeface="Canva Sans"/>
+              </a:rPr>
+              <a:t>Introduction</a:t>
+            </a:r>
+          </a:p>
+          <a:p>
+            <a:pPr marL="742950" indent="-742950" algn="l">
+              <a:lnSpc>
+                <a:spcPct val="150000"/>
+              </a:lnSpc>
+              <a:buFont typeface="Wingdings" panose="05000000000000000000" pitchFamily="2" charset="2"/>
+              <a:buChar char="q"/>
+            </a:pPr>
+            <a:r>
+              <a:rPr lang="en-US" sz="3948" dirty="0" smtClean="0">
+                <a:solidFill>
+                  <a:srgbClr val="FFFFFF"/>
+                </a:solidFill>
+                <a:latin typeface="Canva Sans"/>
+                <a:ea typeface="Canva Sans"/>
+                <a:cs typeface="Canva Sans"/>
+                <a:sym typeface="Canva Sans"/>
+              </a:rPr>
+              <a:t>Abstract</a:t>
+            </a:r>
+            <a:endParaRPr lang="en-US" sz="3948" dirty="0">
+              <a:solidFill>
+                <a:srgbClr val="FFFFFF"/>
+              </a:solidFill>
+              <a:latin typeface="Canva Sans"/>
+              <a:ea typeface="Canva Sans"/>
+              <a:cs typeface="Canva Sans"/>
+              <a:sym typeface="Canva Sans"/>
+            </a:endParaRPr>
+          </a:p>
+          <a:p>
+            <a:pPr marL="571500" indent="-571500" algn="l">
+              <a:lnSpc>
+                <a:spcPct val="150000"/>
+              </a:lnSpc>
+              <a:buFont typeface="Wingdings" panose="05000000000000000000" pitchFamily="2" charset="2"/>
+              <a:buChar char="q"/>
+            </a:pPr>
+            <a:r>
+              <a:rPr lang="en-US" sz="3948" dirty="0" smtClean="0">
+                <a:solidFill>
+                  <a:srgbClr val="FFFFFF"/>
+                </a:solidFill>
+                <a:latin typeface="Canva Sans"/>
+                <a:ea typeface="Canva Sans"/>
+                <a:cs typeface="Canva Sans"/>
+                <a:sym typeface="Canva Sans"/>
+              </a:rPr>
+              <a:t>Literature </a:t>
+            </a:r>
+            <a:r>
+              <a:rPr lang="en-US" sz="3948" dirty="0">
+                <a:solidFill>
+                  <a:srgbClr val="FFFFFF"/>
+                </a:solidFill>
+                <a:latin typeface="Canva Sans"/>
+                <a:ea typeface="Canva Sans"/>
+                <a:cs typeface="Canva Sans"/>
+                <a:sym typeface="Canva Sans"/>
+              </a:rPr>
+              <a:t>Survey</a:t>
+            </a:r>
+          </a:p>
+          <a:p>
+            <a:pPr marL="571500" indent="-571500" algn="l">
+              <a:lnSpc>
+                <a:spcPct val="150000"/>
+              </a:lnSpc>
+              <a:buFont typeface="Wingdings" panose="05000000000000000000" pitchFamily="2" charset="2"/>
+              <a:buChar char="q"/>
+            </a:pPr>
+            <a:r>
+              <a:rPr lang="en-US" sz="3948" dirty="0" smtClean="0">
+                <a:solidFill>
+                  <a:srgbClr val="FFFFFF"/>
+                </a:solidFill>
+                <a:latin typeface="Canva Sans"/>
+                <a:ea typeface="Canva Sans"/>
+                <a:cs typeface="Canva Sans"/>
+                <a:sym typeface="Canva Sans"/>
+              </a:rPr>
+              <a:t>Existing </a:t>
+            </a:r>
+            <a:r>
+              <a:rPr lang="en-US" sz="3948" dirty="0">
+                <a:solidFill>
+                  <a:srgbClr val="FFFFFF"/>
+                </a:solidFill>
+                <a:latin typeface="Canva Sans"/>
+                <a:ea typeface="Canva Sans"/>
+                <a:cs typeface="Canva Sans"/>
+                <a:sym typeface="Canva Sans"/>
+              </a:rPr>
+              <a:t>System</a:t>
+            </a:r>
+          </a:p>
+          <a:p>
+            <a:pPr marL="571500" indent="-571500" algn="l">
+              <a:lnSpc>
+                <a:spcPct val="150000"/>
+              </a:lnSpc>
+              <a:buFont typeface="Wingdings" panose="05000000000000000000" pitchFamily="2" charset="2"/>
+              <a:buChar char="q"/>
+            </a:pPr>
+            <a:r>
+              <a:rPr lang="en-US" sz="3948" dirty="0" smtClean="0">
+                <a:solidFill>
+                  <a:srgbClr val="FFFFFF"/>
+                </a:solidFill>
+                <a:latin typeface="Canva Sans"/>
+                <a:ea typeface="Canva Sans"/>
+                <a:cs typeface="Canva Sans"/>
+                <a:sym typeface="Canva Sans"/>
+              </a:rPr>
+              <a:t>Disadvantages</a:t>
+            </a:r>
+          </a:p>
+          <a:p>
+            <a:pPr marL="571500" indent="-571500" algn="l">
+              <a:lnSpc>
+                <a:spcPct val="150000"/>
+              </a:lnSpc>
+              <a:buFont typeface="Wingdings" panose="05000000000000000000" pitchFamily="2" charset="2"/>
+              <a:buChar char="q"/>
+            </a:pPr>
+            <a:r>
+              <a:rPr lang="en-US" sz="3948" dirty="0" smtClean="0">
+                <a:solidFill>
+                  <a:srgbClr val="FFFFFF"/>
+                </a:solidFill>
+                <a:latin typeface="Canva Sans"/>
+                <a:ea typeface="Canva Sans"/>
+                <a:cs typeface="Canva Sans"/>
+                <a:sym typeface="Canva Sans"/>
+              </a:rPr>
+              <a:t>Problem Statement</a:t>
+            </a:r>
+            <a:endParaRPr lang="en-US" sz="3948" dirty="0">
+              <a:solidFill>
+                <a:srgbClr val="FFFFFF"/>
+              </a:solidFill>
+              <a:latin typeface="Canva Sans"/>
+              <a:ea typeface="Canva Sans"/>
+              <a:cs typeface="Canva Sans"/>
+              <a:sym typeface="Canva Sans"/>
+            </a:endParaRPr>
+          </a:p>
+          <a:p>
             <a:pPr algn="l">
               <a:lnSpc>
                 <a:spcPts val="5528"/>
               </a:lnSpc>
             </a:pPr>
-            <a:r>
-              <a:rPr lang="en-US" sz="3948">
-                <a:solidFill>
-                  <a:srgbClr val="FFFFFF"/>
-                </a:solidFill>
-                <a:latin typeface="Canva Sans"/>
-                <a:ea typeface="Canva Sans"/>
-                <a:cs typeface="Canva Sans"/>
-                <a:sym typeface="Canva Sans"/>
-              </a:rPr>
-              <a:t>1. Introduction</a:t>
-            </a:r>
-          </a:p>
-          <a:p>
-            <a:pPr algn="l">
-              <a:lnSpc>
-                <a:spcPts val="5528"/>
-              </a:lnSpc>
-            </a:pPr>
-            <a:r>
-              <a:rPr lang="en-US" sz="3948">
-                <a:solidFill>
-                  <a:srgbClr val="FFFFFF"/>
-                </a:solidFill>
-                <a:latin typeface="Canva Sans"/>
-                <a:ea typeface="Canva Sans"/>
-                <a:cs typeface="Canva Sans"/>
-                <a:sym typeface="Canva Sans"/>
-              </a:rPr>
-              <a:t>2. Literature Survey</a:t>
-            </a:r>
-          </a:p>
-          <a:p>
-            <a:pPr algn="l">
-              <a:lnSpc>
-                <a:spcPts val="5528"/>
-              </a:lnSpc>
-            </a:pPr>
-            <a:r>
-              <a:rPr lang="en-US" sz="3948">
-                <a:solidFill>
-                  <a:srgbClr val="FFFFFF"/>
-                </a:solidFill>
-                <a:latin typeface="Canva Sans"/>
-                <a:ea typeface="Canva Sans"/>
-                <a:cs typeface="Canva Sans"/>
-                <a:sym typeface="Canva Sans"/>
-              </a:rPr>
-              <a:t>3. Existing System</a:t>
-            </a:r>
-          </a:p>
-          <a:p>
-            <a:pPr algn="l">
-              <a:lnSpc>
-                <a:spcPts val="5528"/>
-              </a:lnSpc>
-            </a:pPr>
-            <a:r>
-              <a:rPr lang="en-US" sz="3948">
-                <a:solidFill>
-                  <a:srgbClr val="FFFFFF"/>
-                </a:solidFill>
-                <a:latin typeface="Canva Sans"/>
-                <a:ea typeface="Canva Sans"/>
-                <a:cs typeface="Canva Sans"/>
-                <a:sym typeface="Canva Sans"/>
-              </a:rPr>
-              <a:t>4. Disadvantages</a:t>
-            </a:r>
-          </a:p>
-          <a:p>
-            <a:pPr algn="l">
-              <a:lnSpc>
-                <a:spcPts val="5528"/>
-              </a:lnSpc>
-            </a:pPr>
-            <a:r>
-              <a:rPr lang="en-US" sz="3948">
-                <a:solidFill>
-                  <a:srgbClr val="FFFFFF"/>
-                </a:solidFill>
-                <a:latin typeface="Canva Sans"/>
-                <a:ea typeface="Canva Sans"/>
-                <a:cs typeface="Canva Sans"/>
-                <a:sym typeface="Canva Sans"/>
-              </a:rPr>
-              <a:t>5. Proposed System</a:t>
-            </a:r>
-          </a:p>
-          <a:p>
-            <a:pPr algn="l">
-              <a:lnSpc>
-                <a:spcPts val="5528"/>
-              </a:lnSpc>
-            </a:pPr>
-            <a:r>
-              <a:rPr lang="en-US" sz="3948">
-                <a:solidFill>
-                  <a:srgbClr val="FFFFFF"/>
-                </a:solidFill>
-                <a:latin typeface="Canva Sans"/>
-                <a:ea typeface="Canva Sans"/>
-                <a:cs typeface="Canva Sans"/>
-                <a:sym typeface="Canva Sans"/>
-              </a:rPr>
-              <a:t>6. Advantages</a:t>
-            </a:r>
-          </a:p>
-          <a:p>
-            <a:pPr algn="l">
-              <a:lnSpc>
-                <a:spcPts val="5528"/>
-              </a:lnSpc>
-            </a:pPr>
-            <a:r>
-              <a:rPr lang="en-US" sz="3948">
-                <a:solidFill>
-                  <a:srgbClr val="FFFFFF"/>
-                </a:solidFill>
-                <a:latin typeface="Canva Sans"/>
-                <a:ea typeface="Canva Sans"/>
-                <a:cs typeface="Canva Sans"/>
-                <a:sym typeface="Canva Sans"/>
-              </a:rPr>
-              <a:t>7. List of Modules</a:t>
-            </a:r>
-          </a:p>
-          <a:p>
-            <a:pPr algn="l">
-              <a:lnSpc>
-                <a:spcPts val="5528"/>
-              </a:lnSpc>
-            </a:pPr>
-            <a:r>
-              <a:rPr lang="en-US" sz="3948">
-                <a:solidFill>
-                  <a:srgbClr val="FFFFFF"/>
-                </a:solidFill>
-                <a:latin typeface="Canva Sans"/>
-                <a:ea typeface="Canva Sans"/>
-                <a:cs typeface="Canva Sans"/>
-                <a:sym typeface="Canva Sans"/>
-              </a:rPr>
-              <a:t>8. Modules Explanation</a:t>
-            </a:r>
-          </a:p>
-          <a:p>
-            <a:pPr algn="l">
-              <a:lnSpc>
-                <a:spcPts val="5528"/>
-              </a:lnSpc>
-            </a:pPr>
-            <a:r>
-              <a:rPr lang="en-US" sz="3948">
-                <a:solidFill>
-                  <a:srgbClr val="FFFFFF"/>
-                </a:solidFill>
-                <a:latin typeface="Canva Sans"/>
-                <a:ea typeface="Canva Sans"/>
-                <a:cs typeface="Canva Sans"/>
-                <a:sym typeface="Canva Sans"/>
-              </a:rPr>
-              <a:t>9. Future Enhancement</a:t>
-            </a:r>
-          </a:p>
-          <a:p>
-            <a:pPr algn="l">
-              <a:lnSpc>
-                <a:spcPts val="5528"/>
-              </a:lnSpc>
-            </a:pPr>
-            <a:r>
-              <a:rPr lang="en-US" sz="3948">
-                <a:solidFill>
-                  <a:srgbClr val="FFFFFF"/>
-                </a:solidFill>
-                <a:latin typeface="Canva Sans"/>
-                <a:ea typeface="Canva Sans"/>
-                <a:cs typeface="Canva Sans"/>
-                <a:sym typeface="Canva Sans"/>
-              </a:rPr>
-              <a:t>10. Conclusion</a:t>
-            </a:r>
-          </a:p>
-          <a:p>
-            <a:pPr algn="l">
-              <a:lnSpc>
-                <a:spcPts val="5528"/>
-              </a:lnSpc>
-            </a:pPr>
-            <a:r>
-              <a:rPr lang="en-US" sz="3948">
-                <a:solidFill>
-                  <a:srgbClr val="FFFFFF"/>
-                </a:solidFill>
-                <a:latin typeface="Canva Sans"/>
-                <a:ea typeface="Canva Sans"/>
-                <a:cs typeface="Canva Sans"/>
-                <a:sym typeface="Canva Sans"/>
-              </a:rPr>
-              <a:t>11. References</a:t>
+            <a:endParaRPr lang="en-US" sz="3948" dirty="0">
+              <a:solidFill>
+                <a:srgbClr val="FFFFFF"/>
+              </a:solidFill>
+              <a:latin typeface="Canva Sans"/>
+              <a:ea typeface="Canva Sans"/>
+              <a:cs typeface="Canva Sans"/>
+              <a:sym typeface="Canva Sans"/>
+            </a:endParaRPr>
+          </a:p>
+        </p:txBody>
+      </p:sp>
+      <p:sp>
+        <p:nvSpPr>
+          <p:cNvPr id="4" name="TextBox 3"/>
+          <p:cNvSpPr txBox="1"/>
+          <p:nvPr/>
+        </p:nvSpPr>
+        <p:spPr>
+          <a:xfrm>
+            <a:off x="9906000" y="2499357"/>
+            <a:ext cx="7340757" cy="6282233"/>
+          </a:xfrm>
+          <a:prstGeom prst="rect">
+            <a:avLst/>
+          </a:prstGeom>
+        </p:spPr>
+        <p:txBody>
+          <a:bodyPr wrap="square" lIns="0" tIns="0" rIns="0" bIns="0" rtlCol="0" anchor="t">
+            <a:spAutoFit/>
+          </a:bodyPr>
+          <a:lstStyle/>
+          <a:p>
+            <a:pPr marL="571500" indent="-571500" algn="l">
+              <a:lnSpc>
+                <a:spcPct val="150000"/>
+              </a:lnSpc>
+              <a:buFont typeface="Wingdings" panose="05000000000000000000" pitchFamily="2" charset="2"/>
+              <a:buChar char="q"/>
+            </a:pPr>
+            <a:r>
+              <a:rPr lang="en-US" sz="3948" dirty="0" smtClean="0">
+                <a:solidFill>
+                  <a:srgbClr val="FFFFFF"/>
+                </a:solidFill>
+                <a:latin typeface="Canva Sans"/>
+                <a:ea typeface="Canva Sans"/>
+                <a:cs typeface="Canva Sans"/>
+                <a:sym typeface="Canva Sans"/>
+              </a:rPr>
+              <a:t>Proposed </a:t>
+            </a:r>
+            <a:r>
+              <a:rPr lang="en-US" sz="3948" dirty="0">
+                <a:solidFill>
+                  <a:srgbClr val="FFFFFF"/>
+                </a:solidFill>
+                <a:latin typeface="Canva Sans"/>
+                <a:ea typeface="Canva Sans"/>
+                <a:cs typeface="Canva Sans"/>
+                <a:sym typeface="Canva Sans"/>
+              </a:rPr>
+              <a:t>System</a:t>
+            </a:r>
+          </a:p>
+          <a:p>
+            <a:pPr marL="571500" indent="-571500" algn="l">
+              <a:lnSpc>
+                <a:spcPct val="150000"/>
+              </a:lnSpc>
+              <a:buFont typeface="Wingdings" panose="05000000000000000000" pitchFamily="2" charset="2"/>
+              <a:buChar char="q"/>
+            </a:pPr>
+            <a:r>
+              <a:rPr lang="en-US" sz="3948" dirty="0" smtClean="0">
+                <a:solidFill>
+                  <a:srgbClr val="FFFFFF"/>
+                </a:solidFill>
+                <a:latin typeface="Canva Sans"/>
+                <a:ea typeface="Canva Sans"/>
+                <a:cs typeface="Canva Sans"/>
+                <a:sym typeface="Canva Sans"/>
+              </a:rPr>
+              <a:t>Advantages</a:t>
+            </a:r>
+            <a:endParaRPr lang="en-US" sz="3948" dirty="0">
+              <a:solidFill>
+                <a:srgbClr val="FFFFFF"/>
+              </a:solidFill>
+              <a:latin typeface="Canva Sans"/>
+              <a:ea typeface="Canva Sans"/>
+              <a:cs typeface="Canva Sans"/>
+              <a:sym typeface="Canva Sans"/>
+            </a:endParaRPr>
+          </a:p>
+          <a:p>
+            <a:pPr marL="571500" indent="-571500" algn="l">
+              <a:lnSpc>
+                <a:spcPct val="150000"/>
+              </a:lnSpc>
+              <a:buFont typeface="Wingdings" panose="05000000000000000000" pitchFamily="2" charset="2"/>
+              <a:buChar char="q"/>
+            </a:pPr>
+            <a:r>
+              <a:rPr lang="en-US" sz="3948" dirty="0" smtClean="0">
+                <a:solidFill>
+                  <a:srgbClr val="FFFFFF"/>
+                </a:solidFill>
+                <a:latin typeface="Canva Sans"/>
+                <a:ea typeface="Canva Sans"/>
+                <a:cs typeface="Canva Sans"/>
+                <a:sym typeface="Canva Sans"/>
+              </a:rPr>
+              <a:t>List </a:t>
+            </a:r>
+            <a:r>
+              <a:rPr lang="en-US" sz="3948" dirty="0">
+                <a:solidFill>
+                  <a:srgbClr val="FFFFFF"/>
+                </a:solidFill>
+                <a:latin typeface="Canva Sans"/>
+                <a:ea typeface="Canva Sans"/>
+                <a:cs typeface="Canva Sans"/>
+                <a:sym typeface="Canva Sans"/>
+              </a:rPr>
+              <a:t>of Modules</a:t>
+            </a:r>
+          </a:p>
+          <a:p>
+            <a:pPr marL="571500" indent="-571500" algn="l">
+              <a:lnSpc>
+                <a:spcPct val="150000"/>
+              </a:lnSpc>
+              <a:buFont typeface="Wingdings" panose="05000000000000000000" pitchFamily="2" charset="2"/>
+              <a:buChar char="q"/>
+            </a:pPr>
+            <a:r>
+              <a:rPr lang="en-US" sz="3948" dirty="0" smtClean="0">
+                <a:solidFill>
+                  <a:srgbClr val="FFFFFF"/>
+                </a:solidFill>
+                <a:latin typeface="Canva Sans"/>
+                <a:ea typeface="Canva Sans"/>
+                <a:cs typeface="Canva Sans"/>
+                <a:sym typeface="Canva Sans"/>
+              </a:rPr>
+              <a:t>Modules </a:t>
+            </a:r>
+            <a:r>
+              <a:rPr lang="en-US" sz="3948" dirty="0">
+                <a:solidFill>
+                  <a:srgbClr val="FFFFFF"/>
+                </a:solidFill>
+                <a:latin typeface="Canva Sans"/>
+                <a:ea typeface="Canva Sans"/>
+                <a:cs typeface="Canva Sans"/>
+                <a:sym typeface="Canva Sans"/>
+              </a:rPr>
+              <a:t>Explanation</a:t>
+            </a:r>
+          </a:p>
+          <a:p>
+            <a:pPr marL="571500" indent="-571500" algn="l">
+              <a:lnSpc>
+                <a:spcPct val="150000"/>
+              </a:lnSpc>
+              <a:buFont typeface="Wingdings" panose="05000000000000000000" pitchFamily="2" charset="2"/>
+              <a:buChar char="q"/>
+            </a:pPr>
+            <a:r>
+              <a:rPr lang="en-US" sz="3948" dirty="0" smtClean="0">
+                <a:solidFill>
+                  <a:srgbClr val="FFFFFF"/>
+                </a:solidFill>
+                <a:latin typeface="Canva Sans"/>
+                <a:ea typeface="Canva Sans"/>
+                <a:cs typeface="Canva Sans"/>
+                <a:sym typeface="Canva Sans"/>
+              </a:rPr>
+              <a:t>Future </a:t>
+            </a:r>
+            <a:r>
+              <a:rPr lang="en-US" sz="3948" dirty="0">
+                <a:solidFill>
+                  <a:srgbClr val="FFFFFF"/>
+                </a:solidFill>
+                <a:latin typeface="Canva Sans"/>
+                <a:ea typeface="Canva Sans"/>
+                <a:cs typeface="Canva Sans"/>
+                <a:sym typeface="Canva Sans"/>
+              </a:rPr>
+              <a:t>Enhancement</a:t>
+            </a:r>
+          </a:p>
+          <a:p>
+            <a:pPr marL="571500" indent="-571500" algn="l">
+              <a:lnSpc>
+                <a:spcPct val="150000"/>
+              </a:lnSpc>
+              <a:buFont typeface="Wingdings" panose="05000000000000000000" pitchFamily="2" charset="2"/>
+              <a:buChar char="q"/>
+            </a:pPr>
+            <a:r>
+              <a:rPr lang="en-US" sz="3948" dirty="0" smtClean="0">
+                <a:solidFill>
+                  <a:srgbClr val="FFFFFF"/>
+                </a:solidFill>
+                <a:latin typeface="Canva Sans"/>
+                <a:ea typeface="Canva Sans"/>
+                <a:cs typeface="Canva Sans"/>
+                <a:sym typeface="Canva Sans"/>
+              </a:rPr>
+              <a:t>Conclusion</a:t>
+            </a:r>
+            <a:endParaRPr lang="en-US" sz="3948" dirty="0">
+              <a:solidFill>
+                <a:srgbClr val="FFFFFF"/>
+              </a:solidFill>
+              <a:latin typeface="Canva Sans"/>
+              <a:ea typeface="Canva Sans"/>
+              <a:cs typeface="Canva Sans"/>
+              <a:sym typeface="Canva Sans"/>
+            </a:endParaRPr>
+          </a:p>
+          <a:p>
+            <a:pPr marL="571500" indent="-571500" algn="l">
+              <a:lnSpc>
+                <a:spcPct val="150000"/>
+              </a:lnSpc>
+              <a:buFont typeface="Wingdings" panose="05000000000000000000" pitchFamily="2" charset="2"/>
+              <a:buChar char="q"/>
+            </a:pPr>
+            <a:r>
+              <a:rPr lang="en-US" sz="3948" dirty="0" smtClean="0">
+                <a:solidFill>
+                  <a:srgbClr val="FFFFFF"/>
+                </a:solidFill>
+                <a:latin typeface="Canva Sans"/>
+                <a:ea typeface="Canva Sans"/>
+                <a:cs typeface="Canva Sans"/>
+                <a:sym typeface="Canva Sans"/>
+              </a:rPr>
+              <a:t> </a:t>
+            </a:r>
+            <a:r>
+              <a:rPr lang="en-US" sz="3948" dirty="0">
+                <a:solidFill>
+                  <a:srgbClr val="FFFFFF"/>
+                </a:solidFill>
+                <a:latin typeface="Canva Sans"/>
+                <a:ea typeface="Canva Sans"/>
+                <a:cs typeface="Canva Sans"/>
+                <a:sym typeface="Canva Sans"/>
+              </a:rPr>
+              <a:t>References</a:t>
             </a:r>
           </a:p>
         </p:txBody>
@@ -7678,6 +8487,155 @@
 </file>
 
 <file path=ppt/slides/slide5.xml><?xml version="1.0" encoding="utf-8"?>
+<p:sld xmlns:a="http://schemas.openxmlformats.org/drawingml/2006/main" xmlns:r="http://schemas.openxmlformats.org/officeDocument/2006/relationships" xmlns:p="http://schemas.openxmlformats.org/presentationml/2006/main">
+  <p:cSld>
+    <p:bg>
+      <p:bgPr>
+        <a:gradFill rotWithShape="1">
+          <a:gsLst>
+            <a:gs pos="0">
+              <a:srgbClr val="000000">
+                <a:alpha val="100000"/>
+              </a:srgbClr>
+            </a:gs>
+            <a:gs pos="100000">
+              <a:srgbClr val="09033D">
+                <a:alpha val="100000"/>
+              </a:srgbClr>
+            </a:gs>
+          </a:gsLst>
+          <a:path path="circle">
+            <a:fillToRect r="100000" b="100000"/>
+          </a:path>
+          <a:tileRect l="-100000" t="-100000"/>
+        </a:gradFill>
+        <a:effectLst/>
+      </p:bgPr>
+    </p:bg>
+    <p:spTree>
+      <p:nvGrpSpPr>
+        <p:cNvPr id="1" name=""/>
+        <p:cNvGrpSpPr/>
+        <p:nvPr/>
+      </p:nvGrpSpPr>
+      <p:grpSpPr>
+        <a:xfrm>
+          <a:off x="0" y="0"/>
+          <a:ext cx="0" cy="0"/>
+          <a:chOff x="0" y="0"/>
+          <a:chExt cx="0" cy="0"/>
+        </a:xfrm>
+      </p:grpSpPr>
+      <p:sp>
+        <p:nvSpPr>
+          <p:cNvPr id="2" name="TextBox 2"/>
+          <p:cNvSpPr txBox="1"/>
+          <p:nvPr/>
+        </p:nvSpPr>
+        <p:spPr>
+          <a:xfrm>
+            <a:off x="-152400" y="723900"/>
+            <a:ext cx="6775049" cy="1066254"/>
+          </a:xfrm>
+          <a:prstGeom prst="rect">
+            <a:avLst/>
+          </a:prstGeom>
+        </p:spPr>
+        <p:txBody>
+          <a:bodyPr wrap="square" lIns="0" tIns="0" rIns="0" bIns="0" rtlCol="0" anchor="t">
+            <a:spAutoFit/>
+          </a:bodyPr>
+          <a:lstStyle/>
+          <a:p>
+            <a:pPr algn="ctr">
+              <a:lnSpc>
+                <a:spcPts val="8890"/>
+              </a:lnSpc>
+            </a:pPr>
+            <a:r>
+              <a:rPr lang="en-US" sz="6350" b="1" dirty="0" smtClean="0">
+                <a:solidFill>
+                  <a:srgbClr val="FFFFFF"/>
+                </a:solidFill>
+                <a:latin typeface="Canva Sans Bold"/>
+                <a:ea typeface="Canva Sans Bold"/>
+                <a:cs typeface="Canva Sans Bold"/>
+                <a:sym typeface="Canva Sans Bold"/>
+              </a:rPr>
+              <a:t>ABSTRACT</a:t>
+            </a:r>
+            <a:endParaRPr lang="en-US" sz="6350" b="1" dirty="0">
+              <a:solidFill>
+                <a:srgbClr val="FFFFFF"/>
+              </a:solidFill>
+              <a:latin typeface="Canva Sans Bold"/>
+              <a:ea typeface="Canva Sans Bold"/>
+              <a:cs typeface="Canva Sans Bold"/>
+              <a:sym typeface="Canva Sans Bold"/>
+            </a:endParaRPr>
+          </a:p>
+        </p:txBody>
+      </p:sp>
+      <p:sp>
+        <p:nvSpPr>
+          <p:cNvPr id="3" name="TextBox 3"/>
+          <p:cNvSpPr txBox="1"/>
+          <p:nvPr/>
+        </p:nvSpPr>
+        <p:spPr>
+          <a:xfrm>
+            <a:off x="609600" y="2324100"/>
+            <a:ext cx="17113351" cy="5730543"/>
+          </a:xfrm>
+          <a:prstGeom prst="rect">
+            <a:avLst/>
+          </a:prstGeom>
+        </p:spPr>
+        <p:txBody>
+          <a:bodyPr lIns="0" tIns="0" rIns="0" bIns="0" rtlCol="0" anchor="t">
+            <a:spAutoFit/>
+          </a:bodyPr>
+          <a:lstStyle/>
+          <a:p>
+            <a:pPr marL="383580" lvl="1" algn="just">
+              <a:lnSpc>
+                <a:spcPct val="150000"/>
+              </a:lnSpc>
+            </a:pPr>
+            <a:r>
+              <a:rPr lang="en-US" sz="3600" dirty="0">
+                <a:solidFill>
+                  <a:schemeClr val="bg1"/>
+                </a:solidFill>
+              </a:rPr>
+              <a:t>Wireless Sensor Networks (WSNs) suffer from limited battery power and high energy consumption due to inefficient routing. This project proposes an intelligent energy-efficient communication model using K-Means clustering and Q-Learning. Sensor nodes are grouped into clusters, and cluster heads are selected based on distance and residual energy. Q-Learning dynamically determines the optimal routing path to the base station. Power control and sleep scheduling further reduce unnecessary energy usage. The proposed approach improves energy efficiency and extends overall network lifetime.</a:t>
+            </a:r>
+            <a:endParaRPr lang="en-US" sz="3553" dirty="0">
+              <a:solidFill>
+                <a:schemeClr val="bg1"/>
+              </a:solidFill>
+              <a:latin typeface="Canva Sans"/>
+              <a:ea typeface="Canva Sans"/>
+              <a:cs typeface="Canva Sans"/>
+              <a:sym typeface="Canva Sans"/>
+            </a:endParaRPr>
+          </a:p>
+        </p:txBody>
+      </p:sp>
+    </p:spTree>
+    <p:extLst>
+      <p:ext uri="{BB962C8B-B14F-4D97-AF65-F5344CB8AC3E}">
+        <p14:creationId xmlns:p14="http://schemas.microsoft.com/office/powerpoint/2010/main" val="2550266859"/>
+      </p:ext>
+    </p:extLst>
+  </p:cSld>
+  <p:clrMapOvr>
+    <a:masterClrMapping/>
+  </p:clrMapOvr>
+</p:sld>
+</file>
+
+<file path=ppt/slides/slide6.xml><?xml version="1.0" encoding="utf-8"?>
 <p:sld xmlns:a="http://schemas.openxmlformats.org/drawingml/2006/main" xmlns:r="http://schemas.openxmlformats.org/officeDocument/2006/relationships" xmlns:p="http://schemas.openxmlformats.org/presentationml/2006/main">
   <p:cSld>
     <p:bg>
@@ -8579,7 +9537,7 @@
 </p:sld>
 </file>
 
-<file path=ppt/slides/slide6.xml><?xml version="1.0" encoding="utf-8"?>
+<file path=ppt/slides/slide7.xml><?xml version="1.0" encoding="utf-8"?>
 <p:sld xmlns:a="http://schemas.openxmlformats.org/drawingml/2006/main" xmlns:r="http://schemas.openxmlformats.org/officeDocument/2006/relationships" xmlns:p="http://schemas.openxmlformats.org/presentationml/2006/main">
   <p:cSld>
     <p:bg>
@@ -9255,7 +10213,7 @@
 </p:sld>
 </file>
 
-<file path=ppt/slides/slide7.xml><?xml version="1.0" encoding="utf-8"?>
+<file path=ppt/slides/slide8.xml><?xml version="1.0" encoding="utf-8"?>
 <p:sld xmlns:a="http://schemas.openxmlformats.org/drawingml/2006/main" xmlns:r="http://schemas.openxmlformats.org/officeDocument/2006/relationships" xmlns:p="http://schemas.openxmlformats.org/presentationml/2006/main">
   <p:cSld>
     <p:bg>
@@ -9557,7 +10515,7 @@
 </p:sld>
 </file>
 
-<file path=ppt/slides/slide8.xml><?xml version="1.0" encoding="utf-8"?>
+<file path=ppt/slides/slide9.xml><?xml version="1.0" encoding="utf-8"?>
 <p:sld xmlns:a="http://schemas.openxmlformats.org/drawingml/2006/main" xmlns:r="http://schemas.openxmlformats.org/officeDocument/2006/relationships" xmlns:p="http://schemas.openxmlformats.org/presentationml/2006/main">
   <p:cSld>
     <p:bg>
@@ -9791,381 +10749,6 @@
               </a:lnSpc>
             </a:pPr>
             <a:endParaRPr lang="en-US" sz="4047">
-              <a:solidFill>
-                <a:srgbClr val="FFFFFF"/>
-              </a:solidFill>
-              <a:latin typeface="Canva Sans"/>
-              <a:ea typeface="Canva Sans"/>
-              <a:cs typeface="Canva Sans"/>
-              <a:sym typeface="Canva Sans"/>
-            </a:endParaRPr>
-          </a:p>
-        </p:txBody>
-      </p:sp>
-    </p:spTree>
-  </p:cSld>
-  <p:clrMapOvr>
-    <a:masterClrMapping/>
-  </p:clrMapOvr>
-</p:sld>
-</file>
-
-<file path=ppt/slides/slide9.xml><?xml version="1.0" encoding="utf-8"?>
-<p:sld xmlns:a="http://schemas.openxmlformats.org/drawingml/2006/main" xmlns:r="http://schemas.openxmlformats.org/officeDocument/2006/relationships" xmlns:p="http://schemas.openxmlformats.org/presentationml/2006/main">
-  <p:cSld>
-    <p:bg>
-      <p:bgPr>
-        <a:gradFill rotWithShape="1">
-          <a:gsLst>
-            <a:gs pos="0">
-              <a:srgbClr val="000000">
-                <a:alpha val="100000"/>
-              </a:srgbClr>
-            </a:gs>
-            <a:gs pos="100000">
-              <a:srgbClr val="09033D">
-                <a:alpha val="100000"/>
-              </a:srgbClr>
-            </a:gs>
-          </a:gsLst>
-          <a:path path="circle">
-            <a:fillToRect r="100000" b="100000"/>
-          </a:path>
-          <a:tileRect l="-100000" t="-100000"/>
-        </a:gradFill>
-        <a:effectLst/>
-      </p:bgPr>
-    </p:bg>
-    <p:spTree>
-      <p:nvGrpSpPr>
-        <p:cNvPr id="1" name=""/>
-        <p:cNvGrpSpPr/>
-        <p:nvPr/>
-      </p:nvGrpSpPr>
-      <p:grpSpPr>
-        <a:xfrm>
-          <a:off x="0" y="0"/>
-          <a:ext cx="0" cy="0"/>
-          <a:chOff x="0" y="0"/>
-          <a:chExt cx="0" cy="0"/>
-        </a:xfrm>
-      </p:grpSpPr>
-      <p:sp>
-        <p:nvSpPr>
-          <p:cNvPr id="2" name="TextBox 2"/>
-          <p:cNvSpPr txBox="1"/>
-          <p:nvPr/>
-        </p:nvSpPr>
-        <p:spPr>
-          <a:xfrm>
-            <a:off x="646134" y="246479"/>
-            <a:ext cx="9031266" cy="1141338"/>
-          </a:xfrm>
-          <a:prstGeom prst="rect">
-            <a:avLst/>
-          </a:prstGeom>
-        </p:spPr>
-        <p:txBody>
-          <a:bodyPr wrap="square" lIns="0" tIns="0" rIns="0" bIns="0" rtlCol="0" anchor="t">
-            <a:spAutoFit/>
-          </a:bodyPr>
-          <a:lstStyle/>
-          <a:p>
-            <a:pPr algn="ctr">
-              <a:lnSpc>
-                <a:spcPts val="8899"/>
-              </a:lnSpc>
-            </a:pPr>
-            <a:r>
-              <a:rPr lang="en-US" sz="6356" b="1" dirty="0">
-                <a:solidFill>
-                  <a:srgbClr val="FFFFFF"/>
-                </a:solidFill>
-                <a:latin typeface="Canva Sans Bold"/>
-                <a:ea typeface="Canva Sans Bold"/>
-                <a:cs typeface="Canva Sans Bold"/>
-                <a:sym typeface="Canva Sans Bold"/>
-              </a:rPr>
-              <a:t>PROPOSED SYSTEM</a:t>
-            </a:r>
-          </a:p>
-        </p:txBody>
-      </p:sp>
-      <p:sp>
-        <p:nvSpPr>
-          <p:cNvPr id="3" name="TextBox 3"/>
-          <p:cNvSpPr txBox="1"/>
-          <p:nvPr/>
-        </p:nvSpPr>
-        <p:spPr>
-          <a:xfrm>
-            <a:off x="646134" y="1819592"/>
-            <a:ext cx="16995732" cy="8381365"/>
-          </a:xfrm>
-          <a:prstGeom prst="rect">
-            <a:avLst/>
-          </a:prstGeom>
-        </p:spPr>
-        <p:txBody>
-          <a:bodyPr lIns="0" tIns="0" rIns="0" bIns="0" rtlCol="0" anchor="t">
-            <a:spAutoFit/>
-          </a:bodyPr>
-          <a:lstStyle/>
-          <a:p>
-            <a:pPr algn="l">
-              <a:lnSpc>
-                <a:spcPts val="4759"/>
-              </a:lnSpc>
-            </a:pPr>
-            <a:r>
-              <a:rPr lang="en-US" sz="3399">
-                <a:solidFill>
-                  <a:srgbClr val="FFFFFF"/>
-                </a:solidFill>
-                <a:latin typeface="Canva Sans"/>
-                <a:ea typeface="Canva Sans"/>
-                <a:cs typeface="Canva Sans"/>
-                <a:sym typeface="Canva Sans"/>
-              </a:rPr>
-              <a:t>✔ </a:t>
-            </a:r>
-            <a:r>
-              <a:rPr lang="en-US" sz="3399" b="1">
-                <a:solidFill>
-                  <a:srgbClr val="FFFFFF"/>
-                </a:solidFill>
-                <a:latin typeface="Canva Sans Bold"/>
-                <a:ea typeface="Canva Sans Bold"/>
-                <a:cs typeface="Canva Sans Bold"/>
-                <a:sym typeface="Canva Sans Bold"/>
-              </a:rPr>
-              <a:t>K-Means Clustering</a:t>
-            </a:r>
-          </a:p>
-          <a:p>
-            <a:pPr algn="l">
-              <a:lnSpc>
-                <a:spcPts val="4759"/>
-              </a:lnSpc>
-            </a:pPr>
-            <a:r>
-              <a:rPr lang="en-US" sz="3399">
-                <a:solidFill>
-                  <a:srgbClr val="FFFFFF"/>
-                </a:solidFill>
-                <a:latin typeface="Canva Sans"/>
-                <a:ea typeface="Canva Sans"/>
-                <a:cs typeface="Canva Sans"/>
-                <a:sym typeface="Canva Sans"/>
-              </a:rPr>
-              <a:t>Groups nodes based on location, creates balanced clusters, and reduces communication distance.</a:t>
-            </a:r>
-          </a:p>
-          <a:p>
-            <a:pPr algn="l">
-              <a:lnSpc>
-                <a:spcPts val="4759"/>
-              </a:lnSpc>
-            </a:pPr>
-            <a:endParaRPr lang="en-US" sz="3399">
-              <a:solidFill>
-                <a:srgbClr val="FFFFFF"/>
-              </a:solidFill>
-              <a:latin typeface="Canva Sans"/>
-              <a:ea typeface="Canva Sans"/>
-              <a:cs typeface="Canva Sans"/>
-              <a:sym typeface="Canva Sans"/>
-            </a:endParaRPr>
-          </a:p>
-          <a:p>
-            <a:pPr algn="l">
-              <a:lnSpc>
-                <a:spcPts val="4759"/>
-              </a:lnSpc>
-            </a:pPr>
-            <a:r>
-              <a:rPr lang="en-US" sz="3399">
-                <a:solidFill>
-                  <a:srgbClr val="FFFFFF"/>
-                </a:solidFill>
-                <a:latin typeface="Canva Sans"/>
-                <a:ea typeface="Canva Sans"/>
-                <a:cs typeface="Canva Sans"/>
-                <a:sym typeface="Canva Sans"/>
-              </a:rPr>
-              <a:t>✔</a:t>
-            </a:r>
-            <a:r>
-              <a:rPr lang="en-US" sz="3399" b="1">
-                <a:solidFill>
-                  <a:srgbClr val="FFFFFF"/>
-                </a:solidFill>
-                <a:latin typeface="Canva Sans Bold"/>
-                <a:ea typeface="Canva Sans Bold"/>
-                <a:cs typeface="Canva Sans Bold"/>
-                <a:sym typeface="Canva Sans Bold"/>
-              </a:rPr>
-              <a:t> Q-Learning Routing</a:t>
-            </a:r>
-          </a:p>
-          <a:p>
-            <a:pPr algn="l">
-              <a:lnSpc>
-                <a:spcPts val="4759"/>
-              </a:lnSpc>
-            </a:pPr>
-            <a:r>
-              <a:rPr lang="en-US" sz="3399">
-                <a:solidFill>
-                  <a:srgbClr val="FFFFFF"/>
-                </a:solidFill>
-                <a:latin typeface="Canva Sans"/>
-                <a:ea typeface="Canva Sans"/>
-                <a:cs typeface="Canva Sans"/>
-                <a:sym typeface="Canva Sans"/>
-              </a:rPr>
-              <a:t>Learns optimal multi-hop routes using rewards based on energy, hop count, and successful delivery.</a:t>
-            </a:r>
-          </a:p>
-          <a:p>
-            <a:pPr algn="l">
-              <a:lnSpc>
-                <a:spcPts val="4759"/>
-              </a:lnSpc>
-            </a:pPr>
-            <a:endParaRPr lang="en-US" sz="3399">
-              <a:solidFill>
-                <a:srgbClr val="FFFFFF"/>
-              </a:solidFill>
-              <a:latin typeface="Canva Sans"/>
-              <a:ea typeface="Canva Sans"/>
-              <a:cs typeface="Canva Sans"/>
-              <a:sym typeface="Canva Sans"/>
-            </a:endParaRPr>
-          </a:p>
-          <a:p>
-            <a:pPr algn="l">
-              <a:lnSpc>
-                <a:spcPts val="4759"/>
-              </a:lnSpc>
-            </a:pPr>
-            <a:r>
-              <a:rPr lang="en-US" sz="3399">
-                <a:solidFill>
-                  <a:srgbClr val="FFFFFF"/>
-                </a:solidFill>
-                <a:latin typeface="Canva Sans"/>
-                <a:ea typeface="Canva Sans"/>
-                <a:cs typeface="Canva Sans"/>
-                <a:sym typeface="Canva Sans"/>
-              </a:rPr>
-              <a:t>✔ </a:t>
-            </a:r>
-            <a:r>
-              <a:rPr lang="en-US" sz="3399" b="1">
-                <a:solidFill>
-                  <a:srgbClr val="FFFFFF"/>
-                </a:solidFill>
-                <a:latin typeface="Canva Sans Bold"/>
-                <a:ea typeface="Canva Sans Bold"/>
-                <a:cs typeface="Canva Sans Bold"/>
-                <a:sym typeface="Canva Sans Bold"/>
-              </a:rPr>
-              <a:t>Energy Model</a:t>
-            </a:r>
-          </a:p>
-          <a:p>
-            <a:pPr algn="l">
-              <a:lnSpc>
-                <a:spcPts val="4759"/>
-              </a:lnSpc>
-            </a:pPr>
-            <a:r>
-              <a:rPr lang="en-US" sz="3399">
-                <a:solidFill>
-                  <a:srgbClr val="FFFFFF"/>
-                </a:solidFill>
-                <a:latin typeface="Canva Sans"/>
-                <a:ea typeface="Canva Sans"/>
-                <a:cs typeface="Canva Sans"/>
-                <a:sym typeface="Canva Sans"/>
-              </a:rPr>
-              <a:t>Tracks transmission, reception, and aggregation energy.</a:t>
-            </a:r>
-          </a:p>
-          <a:p>
-            <a:pPr algn="l">
-              <a:lnSpc>
-                <a:spcPts val="4759"/>
-              </a:lnSpc>
-            </a:pPr>
-            <a:endParaRPr lang="en-US" sz="3399">
-              <a:solidFill>
-                <a:srgbClr val="FFFFFF"/>
-              </a:solidFill>
-              <a:latin typeface="Canva Sans"/>
-              <a:ea typeface="Canva Sans"/>
-              <a:cs typeface="Canva Sans"/>
-              <a:sym typeface="Canva Sans"/>
-            </a:endParaRPr>
-          </a:p>
-          <a:p>
-            <a:pPr algn="l">
-              <a:lnSpc>
-                <a:spcPts val="4759"/>
-              </a:lnSpc>
-            </a:pPr>
-            <a:r>
-              <a:rPr lang="en-US" sz="3399">
-                <a:solidFill>
-                  <a:srgbClr val="FFFFFF"/>
-                </a:solidFill>
-                <a:latin typeface="Canva Sans"/>
-                <a:ea typeface="Canva Sans"/>
-                <a:cs typeface="Canva Sans"/>
-                <a:sym typeface="Canva Sans"/>
-              </a:rPr>
-              <a:t>✔ </a:t>
-            </a:r>
-            <a:r>
-              <a:rPr lang="en-US" sz="3399" b="1">
-                <a:solidFill>
-                  <a:srgbClr val="FFFFFF"/>
-                </a:solidFill>
-                <a:latin typeface="Canva Sans Bold"/>
-                <a:ea typeface="Canva Sans Bold"/>
-                <a:cs typeface="Canva Sans Bold"/>
-                <a:sym typeface="Canva Sans Bold"/>
-              </a:rPr>
-              <a:t>Performance Evaluation</a:t>
-            </a:r>
-          </a:p>
-          <a:p>
-            <a:pPr algn="l">
-              <a:lnSpc>
-                <a:spcPts val="4759"/>
-              </a:lnSpc>
-            </a:pPr>
-            <a:r>
-              <a:rPr lang="en-US" sz="3399">
-                <a:solidFill>
-                  <a:srgbClr val="FFFFFF"/>
-                </a:solidFill>
-                <a:latin typeface="Canva Sans"/>
-                <a:ea typeface="Canva Sans"/>
-                <a:cs typeface="Canva Sans"/>
-                <a:sym typeface="Canva Sans"/>
-              </a:rPr>
-              <a:t>Compares with LEACH, DMHT-LEACH, and modern methods like EECDA.</a:t>
-            </a:r>
-          </a:p>
-          <a:p>
-            <a:pPr algn="ctr">
-              <a:lnSpc>
-                <a:spcPts val="4759"/>
-              </a:lnSpc>
-            </a:pPr>
-            <a:endParaRPr lang="en-US" sz="3399">
               <a:solidFill>
                 <a:srgbClr val="FFFFFF"/>
               </a:solidFill>
